--- a/examples/reference/pptx/kangzhe_probe.pptx
+++ b/examples/reference/pptx/kangzhe_probe.pptx
@@ -660,7 +660,6 @@
         </p:nvPicPr>
         <p:blipFill>
           <a:blip r:embed="rId3"/>
-          <a:srcRect l="413" t="0" r="413" b="0"/>
           <a:stretch>
             <a:fillRect/>
           </a:stretch>

--- a/examples/reference/pptx/kangzhe_probe.pptx
+++ b/examples/reference/pptx/kangzhe_probe.pptx
@@ -676,7 +676,7 @@
       </p:pic>
       <p:grpSp>
         <p:nvGrpSpPr>
-          <p:cNvPr id="5" name="hero-text-0"/>
+          <p:cNvPr id="5" name="hero-cover-title"/>
           <p:cNvGrpSpPr/>
           <p:nvPr/>
         </p:nvGrpSpPr>
@@ -731,7 +731,7 @@
       </p:grpSp>
       <p:grpSp>
         <p:nvGrpSpPr>
-          <p:cNvPr id="7" name="hero-text-1"/>
+          <p:cNvPr id="7" name="hero-hero-subtitle"/>
           <p:cNvGrpSpPr/>
           <p:nvPr/>
         </p:nvGrpSpPr>
@@ -786,7 +786,7 @@
       </p:grpSp>
       <p:grpSp>
         <p:nvGrpSpPr>
-          <p:cNvPr id="9" name="hero-text-2"/>
+          <p:cNvPr id="9" name="hero-hero-meta"/>
           <p:cNvGrpSpPr/>
           <p:nvPr/>
         </p:nvGrpSpPr>

--- a/examples/reference/pptx/kangzhe_probe.pptx
+++ b/examples/reference/pptx/kangzhe_probe.pptx
@@ -650,9 +650,41 @@
           </a:prstGeom>
         </p:spPr>
       </p:pic>
+      <p:sp>
+        <p:nvSpPr>
+          <p:cNvPr id="3" name="hero-image-fade"/>
+          <p:cNvSpPr/>
+          <p:nvPr/>
+        </p:nvSpPr>
+        <p:spPr>
+          <a:xfrm>
+            <a:off x="0" y="381000"/>
+            <a:ext cx="12192000" cy="685800"/>
+          </a:xfrm>
+          <a:prstGeom prst="rect">
+            <a:avLst/>
+          </a:prstGeom>
+          <a:gradFill>
+            <a:gsLst>
+              <a:gs pos="0">
+                <a:srgbClr val="FBFCFD"/>
+              </a:gs>
+              <a:gs pos="100000">
+                <a:srgbClr val="FBFCFD">
+                  <a:alpha val="0"/>
+                </a:srgbClr>
+              </a:gs>
+            </a:gsLst>
+            <a:lin ang="5400000" scaled="1"/>
+          </a:gradFill>
+          <a:ln>
+            <a:noFill/>
+          </a:ln>
+        </p:spPr>
+      </p:sp>
       <p:pic>
         <p:nvPicPr>
-          <p:cNvPr id="3" name="logo"/>
+          <p:cNvPr id="4" name="logo"/>
           <p:cNvPicPr>
             <a:picLocks noChangeAspect="1"/>
           </p:cNvPicPr>
@@ -676,27 +708,27 @@
       </p:pic>
       <p:grpSp>
         <p:nvGrpSpPr>
-          <p:cNvPr id="5" name="hero-cover-title"/>
+          <p:cNvPr id="6" name="hero-cover-title"/>
           <p:cNvGrpSpPr/>
           <p:nvPr/>
         </p:nvGrpSpPr>
         <p:grpSpPr>
           <a:xfrm>
-            <a:off x="857250" y="1534160"/>
+            <a:off x="857250" y="2277110"/>
             <a:ext cx="5126736" cy="819150"/>
-            <a:chOff x="857250" y="1534160"/>
+            <a:chOff x="857250" y="2277110"/>
             <a:chExt cx="5126736" cy="819150"/>
           </a:xfrm>
         </p:grpSpPr>
         <p:sp>
           <p:nvSpPr>
-            <p:cNvPr id="4" name="TextBox 4"/>
+            <p:cNvPr id="5" name="TextBox 5"/>
             <p:cNvSpPr txBox="1"/>
             <p:nvPr/>
           </p:nvSpPr>
           <p:spPr>
             <a:xfrm>
-              <a:off x="857250" y="1534160"/>
+              <a:off x="857250" y="2277110"/>
               <a:ext cx="5126736" cy="819150"/>
             </a:xfrm>
             <a:prstGeom prst="rect">
@@ -723,7 +755,7 @@
                   <a:ea typeface="+mn-ea"/>
                   <a:cs typeface="+mn-cs"/>
                 </a:rPr>
-                <a:t>证据组织与资料核对</a:t>
+                <a:t>研究资料完整性核对</a:t>
               </a:r>
             </a:p>
           </p:txBody>
@@ -731,28 +763,28 @@
       </p:grpSp>
       <p:grpSp>
         <p:nvGrpSpPr>
-          <p:cNvPr id="7" name="hero-hero-subtitle"/>
+          <p:cNvPr id="8" name="hero-hero-subtitle"/>
           <p:cNvGrpSpPr/>
           <p:nvPr/>
         </p:nvGrpSpPr>
         <p:grpSpPr>
           <a:xfrm>
             <a:off x="865632" y="3053080"/>
-            <a:ext cx="3738867" cy="410718"/>
+            <a:ext cx="4374947" cy="410718"/>
             <a:chOff x="865632" y="3053080"/>
-            <a:chExt cx="3738867" cy="410718"/>
+            <a:chExt cx="4374947" cy="410718"/>
           </a:xfrm>
         </p:grpSpPr>
         <p:sp>
           <p:nvSpPr>
-            <p:cNvPr id="6" name="TextBox 6"/>
+            <p:cNvPr id="7" name="TextBox 7"/>
             <p:cNvSpPr txBox="1"/>
             <p:nvPr/>
           </p:nvSpPr>
           <p:spPr>
             <a:xfrm>
               <a:off x="865632" y="3053080"/>
-              <a:ext cx="3738867" cy="410718"/>
+              <a:ext cx="4374947" cy="410718"/>
             </a:xfrm>
             <a:prstGeom prst="rect">
               <a:avLst/>
@@ -778,7 +810,7 @@
                   <a:ea typeface="+mn-ea"/>
                   <a:cs typeface="+mn-cs"/>
                 </a:rPr>
-                <a:t>合成示例 · 研究资料审阅流程</a:t>
+                <a:t>合成示例｜应收 24 份，已收 20 份</a:t>
               </a:r>
             </a:p>
           </p:txBody>
@@ -786,7 +818,7 @@
       </p:grpSp>
       <p:grpSp>
         <p:nvGrpSpPr>
-          <p:cNvPr id="9" name="hero-hero-meta"/>
+          <p:cNvPr id="10" name="hero-hero-meta"/>
           <p:cNvGrpSpPr/>
           <p:nvPr/>
         </p:nvGrpSpPr>
@@ -800,7 +832,7 @@
         </p:grpSpPr>
         <p:sp>
           <p:nvSpPr>
-            <p:cNvPr id="8" name="TextBox 8"/>
+            <p:cNvPr id="9" name="TextBox 9"/>
             <p:cNvSpPr txBox="1"/>
             <p:nvPr/>
           </p:nvSpPr>
@@ -847,6 +879,180 @@
   <p:transition xmlns:p14="http://schemas.microsoft.com/office/powerpoint/2010/main" p14:dur="400">
     <p:fade/>
   </p:transition>
+  <p:timing>
+    <p:tnLst>
+      <p:par>
+        <p:cTn id="1" dur="indefinite" restart="never" nodeType="tmRoot">
+          <p:childTnLst>
+            <p:seq concurrent="1" nextAc="seek">
+              <p:cTn id="2" dur="indefinite" nodeType="mainSeq">
+                <p:childTnLst>
+                  <p:par>
+                    <p:cTn id="3" fill="hold">
+                      <p:stCondLst>
+                        <p:cond delay="indefinite"/>
+                        <p:cond evt="onBegin" delay="0">
+                          <p:tn val="2"/>
+                        </p:cond>
+                      </p:stCondLst>
+                      <p:childTnLst>
+                        <p:par>
+                          <p:cTn id="4" fill="hold">
+                            <p:stCondLst>
+                              <p:cond delay="0"/>
+                            </p:stCondLst>
+                            <p:childTnLst>
+                              <p:par>
+                                <p:cTn xmlns:p="http://schemas.openxmlformats.org/presentationml/2006/main" id="5" presetID="10" presetClass="entr" presetSubtype="0" fill="hold" grpId="0" nodeType="withEffect" decel="70000">
+                                  <p:stCondLst>
+                                    <p:cond delay="0"/>
+                                  </p:stCondLst>
+                                  <p:childTnLst>
+                                    <p:set>
+                                      <p:cBhvr>
+                                        <p:cTn id="6" dur="1" fill="hold">
+                                          <p:stCondLst>
+                                            <p:cond delay="0"/>
+                                          </p:stCondLst>
+                                        </p:cTn>
+                                        <p:tgtEl>
+                                          <p:spTgt spid="6"/>
+                                        </p:tgtEl>
+                                        <p:attrNameLst>
+                                          <p:attrName>style.visibility</p:attrName>
+                                        </p:attrNameLst>
+                                      </p:cBhvr>
+                                      <p:to>
+                                        <p:strVal val="visible"/>
+                                      </p:to>
+                                    </p:set>
+                                    <p:animEffect transition="in" filter="fade">
+                                      <p:cBhvr>
+                                        <p:cTn id="7" dur="520"/>
+                                        <p:tgtEl>
+                                          <p:spTgt spid="6"/>
+                                        </p:tgtEl>
+                                      </p:cBhvr>
+                                    </p:animEffect>
+                                  </p:childTnLst>
+                                </p:cTn>
+                              </p:par>
+                            </p:childTnLst>
+                          </p:cTn>
+                        </p:par>
+                        <p:par>
+                          <p:cTn id="8" fill="hold">
+                            <p:stCondLst>
+                              <p:cond delay="0"/>
+                            </p:stCondLst>
+                            <p:childTnLst>
+                              <p:par>
+                                <p:cTn xmlns:p="http://schemas.openxmlformats.org/presentationml/2006/main" id="9" presetID="10" presetClass="entr" presetSubtype="0" fill="hold" grpId="0" nodeType="withEffect" decel="70000">
+                                  <p:stCondLst>
+                                    <p:cond delay="70"/>
+                                  </p:stCondLst>
+                                  <p:childTnLst>
+                                    <p:set>
+                                      <p:cBhvr>
+                                        <p:cTn id="10" dur="1" fill="hold">
+                                          <p:stCondLst>
+                                            <p:cond delay="0"/>
+                                          </p:stCondLst>
+                                        </p:cTn>
+                                        <p:tgtEl>
+                                          <p:spTgt spid="8"/>
+                                        </p:tgtEl>
+                                        <p:attrNameLst>
+                                          <p:attrName>style.visibility</p:attrName>
+                                        </p:attrNameLst>
+                                      </p:cBhvr>
+                                      <p:to>
+                                        <p:strVal val="visible"/>
+                                      </p:to>
+                                    </p:set>
+                                    <p:animEffect transition="in" filter="fade">
+                                      <p:cBhvr>
+                                        <p:cTn id="11" dur="520"/>
+                                        <p:tgtEl>
+                                          <p:spTgt spid="8"/>
+                                        </p:tgtEl>
+                                      </p:cBhvr>
+                                    </p:animEffect>
+                                  </p:childTnLst>
+                                </p:cTn>
+                              </p:par>
+                            </p:childTnLst>
+                          </p:cTn>
+                        </p:par>
+                        <p:par>
+                          <p:cTn id="12" fill="hold">
+                            <p:stCondLst>
+                              <p:cond delay="70"/>
+                            </p:stCondLst>
+                            <p:childTnLst>
+                              <p:par>
+                                <p:cTn xmlns:p="http://schemas.openxmlformats.org/presentationml/2006/main" id="13" presetID="10" presetClass="entr" presetSubtype="0" fill="hold" grpId="0" nodeType="withEffect" decel="70000">
+                                  <p:stCondLst>
+                                    <p:cond delay="140"/>
+                                  </p:stCondLst>
+                                  <p:childTnLst>
+                                    <p:set>
+                                      <p:cBhvr>
+                                        <p:cTn id="14" dur="1" fill="hold">
+                                          <p:stCondLst>
+                                            <p:cond delay="0"/>
+                                          </p:stCondLst>
+                                        </p:cTn>
+                                        <p:tgtEl>
+                                          <p:spTgt spid="10"/>
+                                        </p:tgtEl>
+                                        <p:attrNameLst>
+                                          <p:attrName>style.visibility</p:attrName>
+                                        </p:attrNameLst>
+                                      </p:cBhvr>
+                                      <p:to>
+                                        <p:strVal val="visible"/>
+                                      </p:to>
+                                    </p:set>
+                                    <p:animEffect transition="in" filter="fade">
+                                      <p:cBhvr>
+                                        <p:cTn id="15" dur="520"/>
+                                        <p:tgtEl>
+                                          <p:spTgt spid="10"/>
+                                        </p:tgtEl>
+                                      </p:cBhvr>
+                                    </p:animEffect>
+                                  </p:childTnLst>
+                                </p:cTn>
+                              </p:par>
+                            </p:childTnLst>
+                          </p:cTn>
+                        </p:par>
+                      </p:childTnLst>
+                    </p:cTn>
+                  </p:par>
+                </p:childTnLst>
+              </p:cTn>
+              <p:prevCondLst>
+                <p:cond evt="onPrev" delay="0">
+                  <p:tgtEl>
+                    <p:sldTgt/>
+                  </p:tgtEl>
+                </p:cond>
+              </p:prevCondLst>
+              <p:nextCondLst>
+                <p:cond evt="onNext" delay="0">
+                  <p:tgtEl>
+                    <p:sldTgt/>
+                  </p:tgtEl>
+                </p:cond>
+              </p:nextCondLst>
+            </p:seq>
+          </p:childTnLst>
+        </p:cTn>
+      </p:par>
+    </p:tnLst>
+  </p:timing>
 </p:sld>
 </file>
 
@@ -908,7 +1114,7 @@
         </p:grpSpPr>
         <p:sp xmlns:p="http://schemas.openxmlformats.org/presentationml/2006/main" xmlns:a="http://schemas.openxmlformats.org/drawingml/2006/main">
           <p:nvSpPr>
-            <p:cNvPr id="39" name="kz-facet-o"/>
+            <p:cNvPr id="37" name="kz-facet-o"/>
             <p:cNvSpPr/>
             <p:nvPr/>
           </p:nvSpPr>
@@ -976,7 +1182,7 @@
         </p:sp>
         <p:sp xmlns:p="http://schemas.openxmlformats.org/presentationml/2006/main" xmlns:a="http://schemas.openxmlformats.org/drawingml/2006/main">
           <p:nvSpPr>
-            <p:cNvPr id="40" name="kz-facet-y"/>
+            <p:cNvPr id="38" name="kz-facet-y"/>
             <p:cNvSpPr/>
             <p:nvPr/>
           </p:nvSpPr>
@@ -1044,7 +1250,7 @@
         </p:sp>
         <p:sp xmlns:p="http://schemas.openxmlformats.org/presentationml/2006/main" xmlns:a="http://schemas.openxmlformats.org/drawingml/2006/main">
           <p:nvSpPr>
-            <p:cNvPr id="41" name="kz-facet-o-candy"/>
+            <p:cNvPr id="39" name="kz-facet-o-candy"/>
             <p:cNvSpPr/>
             <p:nvPr/>
           </p:nvSpPr>
@@ -1140,7 +1346,7 @@
         </p:sp>
         <p:sp xmlns:p="http://schemas.openxmlformats.org/presentationml/2006/main" xmlns:a="http://schemas.openxmlformats.org/drawingml/2006/main">
           <p:nvSpPr>
-            <p:cNvPr id="42" name="kz-facet-y-candy"/>
+            <p:cNvPr id="40" name="kz-facet-y-candy"/>
             <p:cNvSpPr/>
             <p:nvPr/>
           </p:nvSpPr>
@@ -1352,15 +1558,15 @@
       </p:pic>
       <p:grpSp>
         <p:nvGrpSpPr>
-          <p:cNvPr id="18" name="card-1"/>
+          <p:cNvPr id="17" name="card-1"/>
           <p:cNvGrpSpPr/>
           <p:nvPr/>
         </p:nvGrpSpPr>
         <p:grpSpPr>
           <a:xfrm>
-            <a:off x="533400" y="1524000"/>
+            <a:off x="533400" y="1962150"/>
             <a:ext cx="3555682" cy="2247900"/>
-            <a:chOff x="533400" y="1524000"/>
+            <a:chOff x="533400" y="1962150"/>
             <a:chExt cx="3555682" cy="2247900"/>
           </a:xfrm>
         </p:grpSpPr>
@@ -1372,7 +1578,7 @@
           </p:nvSpPr>
           <p:spPr>
             <a:xfrm>
-              <a:off x="533400" y="1524000"/>
+              <a:off x="533400" y="1962150"/>
               <a:ext cx="3555682" cy="2247900"/>
             </a:xfrm>
             <a:prstGeom prst="roundRect">
@@ -1424,7 +1630,7 @@
           </p:nvSpPr>
           <p:spPr>
             <a:xfrm>
-              <a:off x="762000" y="1533525"/>
+              <a:off x="762000" y="1971675"/>
               <a:ext cx="1066800" cy="14288"/>
             </a:xfrm>
             <a:prstGeom prst="rect">
@@ -1457,80 +1663,14 @@
         </p:sp>
         <p:sp>
           <p:nvSpPr>
-            <p:cNvPr id="14" name="Rectangle 14"/>
-            <p:cNvSpPr/>
-            <p:nvPr/>
-          </p:nvSpPr>
-          <p:spPr>
-            <a:xfrm>
-              <a:off x="762000" y="1752600"/>
-              <a:ext cx="323850" cy="323850"/>
-            </a:xfrm>
-            <a:prstGeom prst="roundRect">
-              <a:avLst>
-                <a:gd name="adj" fmla="val 35294"/>
-              </a:avLst>
-            </a:prstGeom>
-            <a:solidFill>
-              <a:srgbClr val="FF9900">
-                <a:alpha val="14000"/>
-              </a:srgbClr>
-            </a:solidFill>
-            <a:ln>
-              <a:noFill/>
-            </a:ln>
-          </p:spPr>
-        </p:sp>
-        <p:sp>
-          <p:nvSpPr>
-            <p:cNvPr id="15" name="TextBox 15"/>
+            <p:cNvPr id="14" name="TextBox 14"/>
             <p:cNvSpPr txBox="1"/>
             <p:nvPr/>
           </p:nvSpPr>
           <p:spPr>
             <a:xfrm>
-              <a:off x="824537" y="1819275"/>
-              <a:ext cx="198775" cy="234696"/>
-            </a:xfrm>
-            <a:prstGeom prst="rect">
-              <a:avLst/>
-            </a:prstGeom>
-            <a:noFill/>
-            <a:ln>
-              <a:noFill/>
-            </a:ln>
-          </p:spPr>
-          <p:txBody>
-            <a:bodyPr wrap="none" lIns="0" tIns="0" rIns="0" bIns="0" anchor="t" anchorCtr="0">
-              <a:spAutoFit/>
-            </a:bodyPr>
-            <a:lstStyle/>
-            <a:p>
-              <a:pPr algn="ctr"/>
-              <a:r>
-                <a:rPr lang="zh-CN" sz="1200" b="1" dirty="0">
-                  <a:solidFill>
-                    <a:srgbClr val="0F1115"/>
-                  </a:solidFill>
-                  <a:latin typeface="+mn-lt"/>
-                  <a:ea typeface="+mn-ea"/>
-                  <a:cs typeface="+mn-cs"/>
-                </a:rPr>
-                <a:t>01</a:t>
-              </a:r>
-            </a:p>
-          </p:txBody>
-        </p:sp>
-        <p:sp>
-          <p:nvSpPr>
-            <p:cNvPr id="16" name="TextBox 16"/>
-            <p:cNvSpPr txBox="1"/>
-            <p:nvPr/>
-          </p:nvSpPr>
-          <p:spPr>
-            <a:xfrm>
-              <a:off x="752856" y="2222500"/>
-              <a:ext cx="987552" cy="352044"/>
+              <a:off x="752856" y="2203450"/>
+              <a:ext cx="1956816" cy="352044"/>
             </a:xfrm>
             <a:prstGeom prst="rect">
               <a:avLst/>
@@ -1556,21 +1696,21 @@
                   <a:ea typeface="+mn-ea"/>
                   <a:cs typeface="+mn-cs"/>
                 </a:rPr>
-                <a:t>研究人群</a:t>
+                <a:t>研究对象与时间窗</a:t>
               </a:r>
             </a:p>
           </p:txBody>
         </p:sp>
         <p:sp>
           <p:nvSpPr>
-            <p:cNvPr id="17" name="TextBox 17"/>
+            <p:cNvPr id="15" name="TextBox 15"/>
             <p:cNvSpPr txBox="1"/>
             <p:nvPr/>
           </p:nvSpPr>
           <p:spPr>
             <a:xfrm>
-              <a:off x="754380" y="2559050"/>
-              <a:ext cx="2653665" cy="1017270"/>
+              <a:off x="747522" y="2611755"/>
+              <a:ext cx="2641930" cy="557403"/>
             </a:xfrm>
             <a:prstGeom prst="rect">
               <a:avLst/>
@@ -1586,75 +1726,79 @@
             </a:bodyPr>
             <a:lstStyle/>
             <a:p>
-              <a:pPr algn="l" marL="161925" indent="-161925">
-                <a:lnSpc>
-                  <a:spcPts val="2850"/>
-                </a:lnSpc>
-                <a:buClr>
-                  <a:srgbClr val="404040"/>
-                </a:buClr>
-                <a:buSzTx/>
-                <a:buFontTx/>
-                <a:buChar char="•"/>
-              </a:pPr>
+              <a:pPr algn="l"/>
               <a:r>
-                <a:rPr lang="zh-CN" sz="1500" dirty="0">
+                <a:rPr lang="zh-CN" sz="2850" b="1" dirty="0">
                   <a:solidFill>
-                    <a:srgbClr val="404040"/>
+                    <a:srgbClr val="0F1115"/>
                   </a:solidFill>
                   <a:latin typeface="+mn-lt"/>
                   <a:ea typeface="+mn-ea"/>
                   <a:cs typeface="+mn-cs"/>
                 </a:rPr>
-                <a:t>成人受试者，筛选期 4 周</a:t>
+                <a:t>成人受试者</a:t>
               </a:r>
-            </a:p>
-            <a:p>
-              <a:pPr algn="l" marL="161925" indent="-161925">
-                <a:lnSpc>
-                  <a:spcPts val="2850"/>
-                </a:lnSpc>
-                <a:buClr>
-                  <a:srgbClr val="404040"/>
-                </a:buClr>
-                <a:buSzTx/>
-                <a:buFontTx/>
-                <a:buChar char="•"/>
-              </a:pPr>
               <a:r>
-                <a:rPr lang="zh-CN" sz="1500" dirty="0">
+                <a:rPr lang="zh-CN" sz="1200" dirty="0">
                   <a:solidFill>
-                    <a:srgbClr val="404040"/>
+                    <a:srgbClr val="64676B"/>
                   </a:solidFill>
                   <a:latin typeface="+mn-lt"/>
                   <a:ea typeface="+mn-ea"/>
                   <a:cs typeface="+mn-cs"/>
                 </a:rPr>
-                <a:t>既往治疗失败或不耐受</a:t>
+                <a:t xml:space="preserve"> 研究对象</a:t>
               </a:r>
             </a:p>
+          </p:txBody>
+        </p:sp>
+        <p:sp>
+          <p:nvSpPr>
+            <p:cNvPr id="16" name="TextBox 16"/>
+            <p:cNvSpPr txBox="1"/>
+            <p:nvPr/>
+          </p:nvSpPr>
+          <p:spPr>
+            <a:xfrm>
+              <a:off x="747522" y="3178492"/>
+              <a:ext cx="2337319" cy="557403"/>
+            </a:xfrm>
+            <a:prstGeom prst="rect">
+              <a:avLst/>
+            </a:prstGeom>
+            <a:noFill/>
+            <a:ln>
+              <a:noFill/>
+            </a:ln>
+          </p:spPr>
+          <p:txBody>
+            <a:bodyPr wrap="none" lIns="0" tIns="0" rIns="0" bIns="0" anchor="t" anchorCtr="0">
+              <a:spAutoFit/>
+            </a:bodyPr>
+            <a:lstStyle/>
             <a:p>
-              <a:pPr algn="l" marL="161925" indent="-161925">
-                <a:lnSpc>
-                  <a:spcPts val="2850"/>
-                </a:lnSpc>
-                <a:buClr>
-                  <a:srgbClr val="404040"/>
-                </a:buClr>
-                <a:buSzTx/>
-                <a:buFontTx/>
-                <a:buChar char="•"/>
-              </a:pPr>
+              <a:pPr algn="l"/>
               <a:r>
-                <a:rPr lang="zh-CN" sz="1500" dirty="0">
+                <a:rPr lang="zh-CN" sz="2850" b="1" dirty="0">
                   <a:solidFill>
-                    <a:srgbClr val="404040"/>
+                    <a:srgbClr val="0F1115"/>
                   </a:solidFill>
                   <a:latin typeface="+mn-lt"/>
                   <a:ea typeface="+mn-ea"/>
                   <a:cs typeface="+mn-cs"/>
                 </a:rPr>
-                <a:t>同期参加其他干预研究者排除</a:t>
+                <a:t>第 16 周</a:t>
+              </a:r>
+              <a:r>
+                <a:rPr lang="zh-CN" sz="1200" dirty="0">
+                  <a:solidFill>
+                    <a:srgbClr val="64676B"/>
+                  </a:solidFill>
+                  <a:latin typeface="+mn-lt"/>
+                  <a:ea typeface="+mn-ea"/>
+                  <a:cs typeface="+mn-cs"/>
+                </a:rPr>
+                <a:t xml:space="preserve"> 评价时间窗</a:t>
               </a:r>
             </a:p>
           </p:txBody>
@@ -1662,27 +1806,27 @@
       </p:grpSp>
       <p:grpSp>
         <p:nvGrpSpPr>
-          <p:cNvPr id="25" name="card-2"/>
+          <p:cNvPr id="24" name="card-2"/>
           <p:cNvGrpSpPr/>
           <p:nvPr/>
         </p:nvGrpSpPr>
         <p:grpSpPr>
           <a:xfrm>
-            <a:off x="4318000" y="1524000"/>
+            <a:off x="4317968" y="1962150"/>
             <a:ext cx="3555682" cy="2247900"/>
-            <a:chOff x="4318000" y="1524000"/>
+            <a:chOff x="4317968" y="1962150"/>
             <a:chExt cx="3555682" cy="2247900"/>
           </a:xfrm>
         </p:grpSpPr>
         <p:sp>
           <p:nvSpPr>
-            <p:cNvPr id="19" name="Rectangle 19"/>
+            <p:cNvPr id="18" name="Rectangle 18"/>
             <p:cNvSpPr/>
             <p:nvPr/>
           </p:nvSpPr>
           <p:spPr>
             <a:xfrm>
-              <a:off x="4318000" y="1524000"/>
+              <a:off x="4317968" y="1962150"/>
               <a:ext cx="3555682" cy="2247900"/>
             </a:xfrm>
             <a:prstGeom prst="roundRect">
@@ -1728,13 +1872,13 @@
         </p:sp>
         <p:sp>
           <p:nvSpPr>
-            <p:cNvPr id="20" name="Rectangle 20"/>
+            <p:cNvPr id="19" name="Rectangle 19"/>
             <p:cNvSpPr/>
             <p:nvPr/>
           </p:nvSpPr>
           <p:spPr>
             <a:xfrm>
-              <a:off x="4546600" y="1533525"/>
+              <a:off x="4546568" y="1971675"/>
               <a:ext cx="1066800" cy="14288"/>
             </a:xfrm>
             <a:prstGeom prst="rect">
@@ -1767,79 +1911,13 @@
         </p:sp>
         <p:sp>
           <p:nvSpPr>
-            <p:cNvPr id="21" name="Rectangle 21"/>
-            <p:cNvSpPr/>
-            <p:nvPr/>
-          </p:nvSpPr>
-          <p:spPr>
-            <a:xfrm>
-              <a:off x="4546600" y="1752600"/>
-              <a:ext cx="323850" cy="323850"/>
-            </a:xfrm>
-            <a:prstGeom prst="roundRect">
-              <a:avLst>
-                <a:gd name="adj" fmla="val 35294"/>
-              </a:avLst>
-            </a:prstGeom>
-            <a:solidFill>
-              <a:srgbClr val="FF9900">
-                <a:alpha val="14000"/>
-              </a:srgbClr>
-            </a:solidFill>
-            <a:ln>
-              <a:noFill/>
-            </a:ln>
-          </p:spPr>
-        </p:sp>
-        <p:sp>
-          <p:nvSpPr>
-            <p:cNvPr id="22" name="TextBox 22"/>
+            <p:cNvPr id="20" name="TextBox 20"/>
             <p:cNvSpPr txBox="1"/>
             <p:nvPr/>
           </p:nvSpPr>
           <p:spPr>
             <a:xfrm>
-              <a:off x="4609137" y="1819275"/>
-              <a:ext cx="198775" cy="234696"/>
-            </a:xfrm>
-            <a:prstGeom prst="rect">
-              <a:avLst/>
-            </a:prstGeom>
-            <a:noFill/>
-            <a:ln>
-              <a:noFill/>
-            </a:ln>
-          </p:spPr>
-          <p:txBody>
-            <a:bodyPr wrap="none" lIns="0" tIns="0" rIns="0" bIns="0" anchor="t" anchorCtr="0">
-              <a:spAutoFit/>
-            </a:bodyPr>
-            <a:lstStyle/>
-            <a:p>
-              <a:pPr algn="ctr"/>
-              <a:r>
-                <a:rPr lang="zh-CN" sz="1200" b="1" dirty="0">
-                  <a:solidFill>
-                    <a:srgbClr val="0F1115"/>
-                  </a:solidFill>
-                  <a:latin typeface="+mn-lt"/>
-                  <a:ea typeface="+mn-ea"/>
-                  <a:cs typeface="+mn-cs"/>
-                </a:rPr>
-                <a:t>02</a:t>
-              </a:r>
-            </a:p>
-          </p:txBody>
-        </p:sp>
-        <p:sp>
-          <p:nvSpPr>
-            <p:cNvPr id="23" name="TextBox 23"/>
-            <p:cNvSpPr txBox="1"/>
-            <p:nvPr/>
-          </p:nvSpPr>
-          <p:spPr>
-            <a:xfrm>
-              <a:off x="4537456" y="2222500"/>
+              <a:off x="4537424" y="2203450"/>
               <a:ext cx="987552" cy="352044"/>
             </a:xfrm>
             <a:prstGeom prst="rect">
@@ -1866,21 +1944,72 @@
                   <a:ea typeface="+mn-ea"/>
                   <a:cs typeface="+mn-cs"/>
                 </a:rPr>
-                <a:t>主要终点</a:t>
+                <a:t>纳入资料</a:t>
               </a:r>
             </a:p>
           </p:txBody>
         </p:sp>
         <p:sp>
           <p:nvSpPr>
-            <p:cNvPr id="24" name="TextBox 24"/>
+            <p:cNvPr id="21" name="TextBox 21"/>
             <p:cNvSpPr txBox="1"/>
             <p:nvPr/>
           </p:nvSpPr>
           <p:spPr>
             <a:xfrm>
-              <a:off x="4538980" y="2559050"/>
-              <a:ext cx="2463165" cy="1017270"/>
+              <a:off x="4532090" y="2611755"/>
+              <a:ext cx="1449685" cy="557403"/>
+            </a:xfrm>
+            <a:prstGeom prst="rect">
+              <a:avLst/>
+            </a:prstGeom>
+            <a:noFill/>
+            <a:ln>
+              <a:noFill/>
+            </a:ln>
+          </p:spPr>
+          <p:txBody>
+            <a:bodyPr wrap="none" lIns="0" tIns="0" rIns="0" bIns="0" anchor="t" anchorCtr="0">
+              <a:spAutoFit/>
+            </a:bodyPr>
+            <a:lstStyle/>
+            <a:p>
+              <a:pPr algn="l"/>
+              <a:r>
+                <a:rPr lang="zh-CN" sz="2850" b="1" dirty="0">
+                  <a:solidFill>
+                    <a:srgbClr val="0F1115"/>
+                  </a:solidFill>
+                  <a:latin typeface="+mn-lt"/>
+                  <a:ea typeface="+mn-ea"/>
+                  <a:cs typeface="+mn-cs"/>
+                </a:rPr>
+                <a:t>4 组</a:t>
+              </a:r>
+              <a:r>
+                <a:rPr lang="zh-CN" sz="1200" dirty="0">
+                  <a:solidFill>
+                    <a:srgbClr val="64676B"/>
+                  </a:solidFill>
+                  <a:latin typeface="+mn-lt"/>
+                  <a:ea typeface="+mn-ea"/>
+                  <a:cs typeface="+mn-cs"/>
+                </a:rPr>
+                <a:t xml:space="preserve"> 纳入核对</a:t>
+              </a:r>
+            </a:p>
+          </p:txBody>
+        </p:sp>
+        <p:sp>
+          <p:nvSpPr>
+            <p:cNvPr id="22" name="TextBox 22"/>
+            <p:cNvSpPr txBox="1"/>
+            <p:nvPr/>
+          </p:nvSpPr>
+          <p:spPr>
+            <a:xfrm>
+              <a:off x="4538948" y="3106738"/>
+              <a:ext cx="1129665" cy="655320"/>
             </a:xfrm>
             <a:prstGeom prst="rect">
               <a:avLst/>
@@ -1916,7 +2045,7 @@
                   <a:ea typeface="+mn-ea"/>
                   <a:cs typeface="+mn-cs"/>
                 </a:rPr>
-                <a:t>第 16 周较基线变化</a:t>
+                <a:t>方案与修订</a:t>
               </a:r>
             </a:p>
             <a:p>
@@ -1940,7 +2069,57 @@
                   <a:ea typeface="+mn-ea"/>
                   <a:cs typeface="+mn-cs"/>
                 </a:rPr>
-                <a:t>缺失值不按零处理</a:t>
+                <a:t>实验室数据</a:t>
+              </a:r>
+            </a:p>
+          </p:txBody>
+        </p:sp>
+        <p:sp>
+          <p:nvSpPr>
+            <p:cNvPr id="23" name="TextBox 23"/>
+            <p:cNvSpPr txBox="1"/>
+            <p:nvPr/>
+          </p:nvSpPr>
+          <p:spPr>
+            <a:xfrm>
+              <a:off x="6088190" y="3106738"/>
+              <a:ext cx="1129665" cy="655320"/>
+            </a:xfrm>
+            <a:prstGeom prst="rect">
+              <a:avLst/>
+            </a:prstGeom>
+            <a:noFill/>
+            <a:ln>
+              <a:noFill/>
+            </a:ln>
+          </p:spPr>
+          <p:txBody>
+            <a:bodyPr wrap="none" lIns="0" tIns="0" rIns="0" bIns="0" anchor="t" anchorCtr="0">
+              <a:spAutoFit/>
+            </a:bodyPr>
+            <a:lstStyle/>
+            <a:p>
+              <a:pPr algn="l" marL="161925" indent="-161925">
+                <a:lnSpc>
+                  <a:spcPts val="2850"/>
+                </a:lnSpc>
+                <a:buClr>
+                  <a:srgbClr val="404040"/>
+                </a:buClr>
+                <a:buSzTx/>
+                <a:buFontTx/>
+                <a:buChar char="•"/>
+              </a:pPr>
+              <a:r>
+                <a:rPr lang="zh-CN" sz="1500" dirty="0">
+                  <a:solidFill>
+                    <a:srgbClr val="404040"/>
+                  </a:solidFill>
+                  <a:latin typeface="+mn-lt"/>
+                  <a:ea typeface="+mn-ea"/>
+                  <a:cs typeface="+mn-cs"/>
+                </a:rPr>
+                <a:t>中心记录</a:t>
               </a:r>
             </a:p>
             <a:p>
@@ -1964,7 +2143,7 @@
                   <a:ea typeface="+mn-ea"/>
                   <a:cs typeface="+mn-cs"/>
                 </a:rPr>
-                <a:t>分析人群与估计量分开说明</a:t>
+                <a:t>安全性报告</a:t>
               </a:r>
             </a:p>
           </p:txBody>
@@ -1972,27 +2151,27 @@
       </p:grpSp>
       <p:grpSp>
         <p:nvGrpSpPr>
-          <p:cNvPr id="32" name="card-3"/>
+          <p:cNvPr id="30" name="card-3"/>
           <p:cNvGrpSpPr/>
           <p:nvPr/>
         </p:nvGrpSpPr>
         <p:grpSpPr>
           <a:xfrm>
-            <a:off x="8102600" y="1524000"/>
+            <a:off x="8102632" y="1962150"/>
             <a:ext cx="3555682" cy="2247900"/>
-            <a:chOff x="8102600" y="1524000"/>
+            <a:chOff x="8102632" y="1962150"/>
             <a:chExt cx="3555682" cy="2247900"/>
           </a:xfrm>
         </p:grpSpPr>
         <p:sp>
           <p:nvSpPr>
-            <p:cNvPr id="26" name="Rectangle 26"/>
+            <p:cNvPr id="25" name="Rectangle 25"/>
             <p:cNvSpPr/>
             <p:nvPr/>
           </p:nvSpPr>
           <p:spPr>
             <a:xfrm>
-              <a:off x="8102600" y="1524000"/>
+              <a:off x="8102632" y="1962150"/>
               <a:ext cx="3555682" cy="2247900"/>
             </a:xfrm>
             <a:prstGeom prst="roundRect">
@@ -2038,13 +2217,13 @@
         </p:sp>
         <p:sp>
           <p:nvSpPr>
-            <p:cNvPr id="27" name="Rectangle 27"/>
+            <p:cNvPr id="26" name="Rectangle 26"/>
             <p:cNvSpPr/>
             <p:nvPr/>
           </p:nvSpPr>
           <p:spPr>
             <a:xfrm>
-              <a:off x="8331200" y="1533525"/>
+              <a:off x="8331232" y="1971675"/>
               <a:ext cx="1066800" cy="14288"/>
             </a:xfrm>
             <a:prstGeom prst="rect">
@@ -2077,80 +2256,14 @@
         </p:sp>
         <p:sp>
           <p:nvSpPr>
-            <p:cNvPr id="28" name="Rectangle 28"/>
-            <p:cNvSpPr/>
-            <p:nvPr/>
-          </p:nvSpPr>
-          <p:spPr>
-            <a:xfrm>
-              <a:off x="8331200" y="1752600"/>
-              <a:ext cx="323850" cy="323850"/>
-            </a:xfrm>
-            <a:prstGeom prst="roundRect">
-              <a:avLst>
-                <a:gd name="adj" fmla="val 35294"/>
-              </a:avLst>
-            </a:prstGeom>
-            <a:solidFill>
-              <a:srgbClr val="FF9900">
-                <a:alpha val="14000"/>
-              </a:srgbClr>
-            </a:solidFill>
-            <a:ln>
-              <a:noFill/>
-            </a:ln>
-          </p:spPr>
-        </p:sp>
-        <p:sp>
-          <p:nvSpPr>
-            <p:cNvPr id="29" name="TextBox 29"/>
+            <p:cNvPr id="27" name="TextBox 27"/>
             <p:cNvSpPr txBox="1"/>
             <p:nvPr/>
           </p:nvSpPr>
           <p:spPr>
             <a:xfrm>
-              <a:off x="8393737" y="1819275"/>
-              <a:ext cx="198775" cy="234696"/>
-            </a:xfrm>
-            <a:prstGeom prst="rect">
-              <a:avLst/>
-            </a:prstGeom>
-            <a:noFill/>
-            <a:ln>
-              <a:noFill/>
-            </a:ln>
-          </p:spPr>
-          <p:txBody>
-            <a:bodyPr wrap="none" lIns="0" tIns="0" rIns="0" bIns="0" anchor="t" anchorCtr="0">
-              <a:spAutoFit/>
-            </a:bodyPr>
-            <a:lstStyle/>
-            <a:p>
-              <a:pPr algn="ctr"/>
-              <a:r>
-                <a:rPr lang="zh-CN" sz="1200" b="1" dirty="0">
-                  <a:solidFill>
-                    <a:srgbClr val="0F1115"/>
-                  </a:solidFill>
-                  <a:latin typeface="+mn-lt"/>
-                  <a:ea typeface="+mn-ea"/>
-                  <a:cs typeface="+mn-cs"/>
-                </a:rPr>
-                <a:t>03</a:t>
-              </a:r>
-            </a:p>
-          </p:txBody>
-        </p:sp>
-        <p:sp>
-          <p:nvSpPr>
-            <p:cNvPr id="30" name="TextBox 30"/>
-            <p:cNvSpPr txBox="1"/>
-            <p:nvPr/>
-          </p:nvSpPr>
-          <p:spPr>
-            <a:xfrm>
-              <a:off x="8322056" y="2222500"/>
-              <a:ext cx="745236" cy="352044"/>
+              <a:off x="8322088" y="2203450"/>
+              <a:ext cx="987552" cy="352044"/>
             </a:xfrm>
             <a:prstGeom prst="rect">
               <a:avLst/>
@@ -2176,21 +2289,72 @@
                   <a:ea typeface="+mn-ea"/>
                   <a:cs typeface="+mn-cs"/>
                 </a:rPr>
-                <a:t>安全性</a:t>
+                <a:t>方案版本</a:t>
               </a:r>
             </a:p>
           </p:txBody>
         </p:sp>
         <p:sp>
           <p:nvSpPr>
-            <p:cNvPr id="31" name="TextBox 31"/>
+            <p:cNvPr id="28" name="TextBox 28"/>
             <p:cNvSpPr txBox="1"/>
             <p:nvPr/>
           </p:nvSpPr>
           <p:spPr>
             <a:xfrm>
-              <a:off x="8323580" y="2559050"/>
-              <a:ext cx="1891665" cy="1017270"/>
+              <a:off x="8316754" y="2611755"/>
+              <a:ext cx="1611229" cy="557403"/>
+            </a:xfrm>
+            <a:prstGeom prst="rect">
+              <a:avLst/>
+            </a:prstGeom>
+            <a:noFill/>
+            <a:ln>
+              <a:noFill/>
+            </a:ln>
+          </p:spPr>
+          <p:txBody>
+            <a:bodyPr wrap="none" lIns="0" tIns="0" rIns="0" bIns="0" anchor="t" anchorCtr="0">
+              <a:spAutoFit/>
+            </a:bodyPr>
+            <a:lstStyle/>
+            <a:p>
+              <a:pPr algn="l"/>
+              <a:r>
+                <a:rPr lang="zh-CN" sz="2850" b="1" dirty="0">
+                  <a:solidFill>
+                    <a:srgbClr val="C00000"/>
+                  </a:solidFill>
+                  <a:latin typeface="+mn-lt"/>
+                  <a:ea typeface="+mn-ea"/>
+                  <a:cs typeface="+mn-cs"/>
+                </a:rPr>
+                <a:t>2 项</a:t>
+              </a:r>
+              <a:r>
+                <a:rPr lang="zh-CN" sz="1200" dirty="0">
+                  <a:solidFill>
+                    <a:srgbClr val="64676B"/>
+                  </a:solidFill>
+                  <a:latin typeface="+mn-lt"/>
+                  <a:ea typeface="+mn-ea"/>
+                  <a:cs typeface="+mn-cs"/>
+                </a:rPr>
+                <a:t xml:space="preserve"> 待确认差异</a:t>
+              </a:r>
+            </a:p>
+          </p:txBody>
+        </p:sp>
+        <p:sp>
+          <p:nvSpPr>
+            <p:cNvPr id="29" name="TextBox 29"/>
+            <p:cNvSpPr txBox="1"/>
+            <p:nvPr/>
+          </p:nvSpPr>
+          <p:spPr>
+            <a:xfrm>
+              <a:off x="8323612" y="3106738"/>
+              <a:ext cx="2463165" cy="655320"/>
             </a:xfrm>
             <a:prstGeom prst="rect">
               <a:avLst/>
@@ -2226,7 +2390,7 @@
                   <a:ea typeface="+mn-ea"/>
                   <a:cs typeface="+mn-cs"/>
                 </a:rPr>
-                <a:t>治疗期间不良事件</a:t>
+                <a:t>V2.1 与 V2.3 并排比较</a:t>
               </a:r>
             </a:p>
             <a:p>
@@ -2250,31 +2414,7 @@
                   <a:ea typeface="+mn-ea"/>
                   <a:cs typeface="+mn-cs"/>
                 </a:rPr>
-                <a:t>停药原因分开登记</a:t>
-              </a:r>
-            </a:p>
-            <a:p>
-              <a:pPr algn="l" marL="161925" indent="-161925">
-                <a:lnSpc>
-                  <a:spcPts val="2850"/>
-                </a:lnSpc>
-                <a:buClr>
-                  <a:srgbClr val="404040"/>
-                </a:buClr>
-                <a:buSzTx/>
-                <a:buFontTx/>
-                <a:buChar char="•"/>
-              </a:pPr>
-              <a:r>
-                <a:rPr lang="zh-CN" sz="1500" dirty="0">
-                  <a:solidFill>
-                    <a:srgbClr val="404040"/>
-                  </a:solidFill>
-                  <a:latin typeface="+mn-lt"/>
-                  <a:ea typeface="+mn-ea"/>
-                  <a:cs typeface="+mn-cs"/>
-                </a:rPr>
-                <a:t>严重事件单列时间线</a:t>
+                <a:t>筛选窗口、终点评价时间点</a:t>
               </a:r>
             </a:p>
           </p:txBody>
@@ -2282,27 +2422,27 @@
       </p:grpSp>
       <p:grpSp>
         <p:nvGrpSpPr>
-          <p:cNvPr id="35" name="takeaway"/>
+          <p:cNvPr id="33" name="takeaway"/>
           <p:cNvGrpSpPr/>
           <p:nvPr/>
         </p:nvGrpSpPr>
         <p:grpSpPr>
           <a:xfrm>
-            <a:off x="533400" y="4000500"/>
+            <a:off x="533400" y="4438650"/>
             <a:ext cx="11125200" cy="800100"/>
-            <a:chOff x="533400" y="4000500"/>
+            <a:chOff x="533400" y="4438650"/>
             <a:chExt cx="11125200" cy="800100"/>
           </a:xfrm>
         </p:grpSpPr>
         <p:sp>
           <p:nvSpPr>
-            <p:cNvPr id="33" name="Rectangle 33"/>
+            <p:cNvPr id="31" name="Rectangle 31"/>
             <p:cNvSpPr/>
             <p:nvPr/>
           </p:nvSpPr>
           <p:spPr>
             <a:xfrm>
-              <a:off x="533400" y="4000500"/>
+              <a:off x="533400" y="4438650"/>
               <a:ext cx="11125200" cy="800100"/>
             </a:xfrm>
             <a:prstGeom prst="roundRect">
@@ -2348,14 +2488,14 @@
         </p:sp>
         <p:sp>
           <p:nvSpPr>
-            <p:cNvPr id="34" name="TextBox 34"/>
+            <p:cNvPr id="32" name="TextBox 32"/>
             <p:cNvSpPr txBox="1"/>
             <p:nvPr/>
           </p:nvSpPr>
           <p:spPr>
             <a:xfrm>
-              <a:off x="3568587" y="4260850"/>
-              <a:ext cx="5054826" cy="352044"/>
+              <a:off x="4269486" y="4737100"/>
+              <a:ext cx="3653028" cy="352044"/>
             </a:xfrm>
             <a:prstGeom prst="rect">
               <a:avLst/>
@@ -2381,7 +2521,7 @@
                   <a:ea typeface="+mn-ea"/>
                   <a:cs typeface="+mn-cs"/>
                 </a:rPr>
-                <a:t>主要终点按第 16 周评价，缺失记录</a:t>
+                <a:t>版本差异</a:t>
               </a:r>
               <a:r>
                 <a:rPr lang="zh-CN" sz="1800" b="1" dirty="0">
@@ -2392,7 +2532,18 @@
                   <a:ea typeface="+mn-ea"/>
                   <a:cs typeface="+mn-cs"/>
                 </a:rPr>
-                <a:t>保留为空值</a:t>
+                <a:t>确认之后</a:t>
+              </a:r>
+              <a:r>
+                <a:rPr lang="zh-CN" sz="1800" b="1" dirty="0">
+                  <a:solidFill>
+                    <a:srgbClr val="0F1115"/>
+                  </a:solidFill>
+                  <a:latin typeface="+mn-lt"/>
+                  <a:ea typeface="+mn-ea"/>
+                  <a:cs typeface="+mn-cs"/>
+                </a:rPr>
+                <a:t>，再做组间比较</a:t>
               </a:r>
             </a:p>
           </p:txBody>
@@ -2400,7 +2551,7 @@
       </p:grpSp>
       <p:grpSp>
         <p:nvGrpSpPr>
-          <p:cNvPr id="38" name="footer"/>
+          <p:cNvPr id="36" name="footer"/>
           <p:cNvGrpSpPr/>
           <p:nvPr/>
         </p:nvGrpSpPr>
@@ -2414,7 +2565,7 @@
         </p:grpSpPr>
         <p:sp>
           <p:nvSpPr>
-            <p:cNvPr id="36" name="TextBox 36"/>
+            <p:cNvPr id="34" name="TextBox 34"/>
             <p:cNvSpPr txBox="1"/>
             <p:nvPr/>
           </p:nvSpPr>
@@ -2454,7 +2605,7 @@
         </p:sp>
         <p:sp>
           <p:nvSpPr>
-            <p:cNvPr id="37" name="TextBox 37"/>
+            <p:cNvPr id="35" name="TextBox 35"/>
             <p:cNvSpPr txBox="1"/>
             <p:nvPr/>
           </p:nvSpPr>
@@ -2538,7 +2689,7 @@
                                           </p:stCondLst>
                                         </p:cTn>
                                         <p:tgtEl>
-                                          <p:spTgt spid="18"/>
+                                          <p:spTgt spid="17"/>
                                         </p:tgtEl>
                                         <p:attrNameLst>
                                           <p:attrName>style.visibility</p:attrName>
@@ -2552,7 +2703,7 @@
                                       <p:cBhvr>
                                         <p:cTn id="7" dur="520"/>
                                         <p:tgtEl>
-                                          <p:spTgt spid="18"/>
+                                          <p:spTgt spid="17"/>
                                         </p:tgtEl>
                                       </p:cBhvr>
                                     </p:animEffect>
@@ -2582,7 +2733,7 @@
                                           </p:stCondLst>
                                         </p:cTn>
                                         <p:tgtEl>
-                                          <p:spTgt spid="25"/>
+                                          <p:spTgt spid="24"/>
                                         </p:tgtEl>
                                         <p:attrNameLst>
                                           <p:attrName>style.visibility</p:attrName>
@@ -2596,7 +2747,7 @@
                                       <p:cBhvr>
                                         <p:cTn id="11" dur="520"/>
                                         <p:tgtEl>
-                                          <p:spTgt spid="25"/>
+                                          <p:spTgt spid="24"/>
                                         </p:tgtEl>
                                       </p:cBhvr>
                                     </p:animEffect>
@@ -2626,7 +2777,7 @@
                                           </p:stCondLst>
                                         </p:cTn>
                                         <p:tgtEl>
-                                          <p:spTgt spid="32"/>
+                                          <p:spTgt spid="30"/>
                                         </p:tgtEl>
                                         <p:attrNameLst>
                                           <p:attrName>style.visibility</p:attrName>
@@ -2640,7 +2791,7 @@
                                       <p:cBhvr>
                                         <p:cTn id="15" dur="520"/>
                                         <p:tgtEl>
-                                          <p:spTgt spid="32"/>
+                                          <p:spTgt spid="30"/>
                                         </p:tgtEl>
                                       </p:cBhvr>
                                     </p:animEffect>
@@ -2670,7 +2821,7 @@
                                           </p:stCondLst>
                                         </p:cTn>
                                         <p:tgtEl>
-                                          <p:spTgt spid="35"/>
+                                          <p:spTgt spid="33"/>
                                         </p:tgtEl>
                                         <p:attrNameLst>
                                           <p:attrName>style.visibility</p:attrName>
@@ -2684,7 +2835,7 @@
                                       <p:cBhvr>
                                         <p:cTn id="19" dur="520"/>
                                         <p:tgtEl>
-                                          <p:spTgt spid="35"/>
+                                          <p:spTgt spid="33"/>
                                         </p:tgtEl>
                                       </p:cBhvr>
                                     </p:animEffect>
@@ -2780,7 +2931,7 @@
         </p:grpSpPr>
         <p:sp xmlns:p="http://schemas.openxmlformats.org/presentationml/2006/main" xmlns:a="http://schemas.openxmlformats.org/drawingml/2006/main">
           <p:nvSpPr>
-            <p:cNvPr id="19" name="kz-facet-o"/>
+            <p:cNvPr id="29" name="kz-facet-o"/>
             <p:cNvSpPr/>
             <p:nvPr/>
           </p:nvSpPr>
@@ -2848,7 +2999,7 @@
         </p:sp>
         <p:sp xmlns:p="http://schemas.openxmlformats.org/presentationml/2006/main" xmlns:a="http://schemas.openxmlformats.org/drawingml/2006/main">
           <p:nvSpPr>
-            <p:cNvPr id="20" name="kz-facet-y"/>
+            <p:cNvPr id="30" name="kz-facet-y"/>
             <p:cNvSpPr/>
             <p:nvPr/>
           </p:nvSpPr>
@@ -2916,7 +3067,7 @@
         </p:sp>
         <p:sp xmlns:p="http://schemas.openxmlformats.org/presentationml/2006/main" xmlns:a="http://schemas.openxmlformats.org/drawingml/2006/main">
           <p:nvSpPr>
-            <p:cNvPr id="21" name="kz-facet-o-candy"/>
+            <p:cNvPr id="31" name="kz-facet-o-candy"/>
             <p:cNvSpPr/>
             <p:nvPr/>
           </p:nvSpPr>
@@ -3012,7 +3163,7 @@
         </p:sp>
         <p:sp xmlns:p="http://schemas.openxmlformats.org/presentationml/2006/main" xmlns:a="http://schemas.openxmlformats.org/drawingml/2006/main">
           <p:nvSpPr>
-            <p:cNvPr id="22" name="kz-facet-y-candy"/>
+            <p:cNvPr id="32" name="kz-facet-y-candy"/>
             <p:cNvSpPr/>
             <p:nvPr/>
           </p:nvSpPr>
@@ -3116,9 +3267,9 @@
         <p:grpSpPr>
           <a:xfrm>
             <a:off x="854583" y="241300"/>
-            <a:ext cx="1962912" cy="469392"/>
+            <a:ext cx="1316736" cy="469392"/>
             <a:chOff x="854583" y="241300"/>
-            <a:chExt cx="1962912" cy="469392"/>
+            <a:chExt cx="1316736" cy="469392"/>
           </a:xfrm>
         </p:grpSpPr>
         <p:sp>
@@ -3130,7 +3281,7 @@
           <p:spPr>
             <a:xfrm>
               <a:off x="854583" y="241300"/>
-              <a:ext cx="1962912" cy="469392"/>
+              <a:ext cx="1316736" cy="469392"/>
             </a:xfrm>
             <a:prstGeom prst="rect">
               <a:avLst/>
@@ -3156,7 +3307,7 @@
                   <a:ea typeface="+mn-ea"/>
                   <a:cs typeface="+mn-cs"/>
                 </a:rPr>
-                <a:t>证据组织过程</a:t>
+                <a:t>核对流程</a:t>
               </a:r>
             </a:p>
           </p:txBody>
@@ -3224,16 +3375,16 @@
       </p:pic>
       <p:grpSp>
         <p:nvGrpSpPr>
-          <p:cNvPr id="15" name="!!kz-carrier"/>
+          <p:cNvPr id="16" name="!!kz-carrier"/>
           <p:cNvGrpSpPr/>
           <p:nvPr/>
         </p:nvGrpSpPr>
         <p:grpSpPr>
           <a:xfrm>
-            <a:off x="762000" y="1428750"/>
-            <a:ext cx="4953000" cy="2857500"/>
-            <a:chOff x="762000" y="1428750"/>
-            <a:chExt cx="4953000" cy="2857500"/>
+            <a:off x="3429000" y="2019300"/>
+            <a:ext cx="5334000" cy="2476500"/>
+            <a:chOff x="3429000" y="2019300"/>
+            <a:chExt cx="5334000" cy="2476500"/>
           </a:xfrm>
         </p:grpSpPr>
         <p:sp>
@@ -3244,12 +3395,12 @@
           </p:nvSpPr>
           <p:spPr>
             <a:xfrm>
-              <a:off x="762000" y="1428750"/>
-              <a:ext cx="4953000" cy="2857500"/>
+              <a:off x="3429000" y="2019300"/>
+              <a:ext cx="5334000" cy="2476500"/>
             </a:xfrm>
             <a:prstGeom prst="roundRect">
               <a:avLst>
-                <a:gd name="adj" fmla="val 9333"/>
+                <a:gd name="adj" fmla="val 10769"/>
               </a:avLst>
             </a:prstGeom>
             <a:gradFill>
@@ -3296,8 +3447,8 @@
           </p:nvSpPr>
           <p:spPr>
             <a:xfrm>
-              <a:off x="2703576" y="1720850"/>
-              <a:ext cx="1069848" cy="381381"/>
+              <a:off x="3800856" y="2374900"/>
+              <a:ext cx="987552" cy="352044"/>
             </a:xfrm>
             <a:prstGeom prst="rect">
               <a:avLst/>
@@ -3313,9 +3464,9 @@
             </a:bodyPr>
             <a:lstStyle/>
             <a:p>
-              <a:pPr algn="ctr"/>
+              <a:pPr algn="l"/>
               <a:r>
-                <a:rPr lang="zh-CN" sz="1950" b="1" dirty="0">
+                <a:rPr lang="zh-CN" sz="1800" b="1" dirty="0">
                   <a:solidFill>
                     <a:srgbClr val="0F1115"/>
                   </a:solidFill>
@@ -3336,8 +3487,48 @@
           </p:nvSpPr>
           <p:spPr>
             <a:xfrm>
-              <a:off x="1059180" y="2184400"/>
-              <a:ext cx="2463165" cy="1055370"/>
+              <a:off x="3803904" y="2781300"/>
+              <a:ext cx="2435352" cy="234696"/>
+            </a:xfrm>
+            <a:prstGeom prst="rect">
+              <a:avLst/>
+            </a:prstGeom>
+            <a:noFill/>
+            <a:ln>
+              <a:noFill/>
+            </a:ln>
+          </p:spPr>
+          <p:txBody>
+            <a:bodyPr wrap="none" lIns="0" tIns="0" rIns="0" bIns="0" anchor="t" anchorCtr="0">
+              <a:spAutoFit/>
+            </a:bodyPr>
+            <a:lstStyle/>
+            <a:p>
+              <a:pPr algn="l"/>
+              <a:r>
+                <a:rPr lang="zh-CN" sz="1200" dirty="0">
+                  <a:solidFill>
+                    <a:srgbClr val="64676B"/>
+                  </a:solidFill>
+                  <a:latin typeface="+mn-lt"/>
+                  <a:ea typeface="+mn-ea"/>
+                  <a:cs typeface="+mn-cs"/>
+                </a:rPr>
+                <a:t>先定对象、时间窗和纳入的资料。</a:t>
+              </a:r>
+            </a:p>
+          </p:txBody>
+        </p:sp>
+        <p:sp>
+          <p:nvSpPr>
+            <p:cNvPr id="15" name="TextBox 15"/>
+            <p:cNvSpPr txBox="1"/>
+            <p:nvPr/>
+          </p:nvSpPr>
+          <p:spPr>
+            <a:xfrm>
+              <a:off x="3802380" y="3105150"/>
+              <a:ext cx="2082165" cy="1093470"/>
             </a:xfrm>
             <a:prstGeom prst="rect">
               <a:avLst/>
@@ -3355,7 +3546,7 @@
             <a:p>
               <a:pPr algn="l" marL="161925" indent="-161925">
                 <a:lnSpc>
-                  <a:spcPts val="3000"/>
+                  <a:spcPts val="3150"/>
                 </a:lnSpc>
                 <a:buClr>
                   <a:srgbClr val="404040"/>
@@ -3379,7 +3570,7 @@
             <a:p>
               <a:pPr algn="l" marL="161925" indent="-161925">
                 <a:lnSpc>
-                  <a:spcPts val="3000"/>
+                  <a:spcPts val="3150"/>
                 </a:lnSpc>
                 <a:buClr>
                   <a:srgbClr val="404040"/>
@@ -3397,13 +3588,24 @@
                   <a:ea typeface="+mn-ea"/>
                   <a:cs typeface="+mn-cs"/>
                 </a:rPr>
-                <a:t>评价时间窗：第 16 周</a:t>
+                <a:t>评价时间窗：</a:t>
+              </a:r>
+              <a:r>
+                <a:rPr lang="zh-CN" sz="1500" b="1" dirty="0">
+                  <a:solidFill>
+                    <a:srgbClr val="0F1115"/>
+                  </a:solidFill>
+                  <a:latin typeface="+mn-lt"/>
+                  <a:ea typeface="+mn-ea"/>
+                  <a:cs typeface="+mn-cs"/>
+                </a:rPr>
+                <a:t>第 16 周</a:t>
               </a:r>
             </a:p>
             <a:p>
               <a:pPr algn="l" marL="161925" indent="-161925">
                 <a:lnSpc>
-                  <a:spcPts val="3000"/>
+                  <a:spcPts val="3150"/>
                 </a:lnSpc>
                 <a:buClr>
                   <a:srgbClr val="404040"/>
@@ -3421,7 +3623,7 @@
                   <a:ea typeface="+mn-ea"/>
                   <a:cs typeface="+mn-cs"/>
                 </a:rPr>
-                <a:t>纳入资料：方案、中心记录</a:t>
+                <a:t>纳入资料：4 组</a:t>
               </a:r>
             </a:p>
           </p:txBody>
@@ -3429,7 +3631,302 @@
       </p:grpSp>
       <p:grpSp>
         <p:nvGrpSpPr>
-          <p:cNvPr id="18" name="footer"/>
+          <p:cNvPr id="25" name="steps"/>
+          <p:cNvGrpSpPr/>
+          <p:nvPr/>
+        </p:nvGrpSpPr>
+        <p:grpSpPr>
+          <a:xfrm>
+            <a:off x="533400" y="5600700"/>
+            <a:ext cx="11125200" cy="457200"/>
+            <a:chOff x="533400" y="5600700"/>
+            <a:chExt cx="11125200" cy="457200"/>
+          </a:xfrm>
+        </p:grpSpPr>
+        <p:sp>
+          <p:nvSpPr>
+            <p:cNvPr id="17" name="Rectangle 17"/>
+            <p:cNvSpPr/>
+            <p:nvPr/>
+          </p:nvSpPr>
+          <p:spPr>
+            <a:xfrm>
+              <a:off x="533400" y="5600700"/>
+              <a:ext cx="2667000" cy="457200"/>
+            </a:xfrm>
+            <a:prstGeom prst="roundRect">
+              <a:avLst>
+                <a:gd name="adj" fmla="val 33333"/>
+              </a:avLst>
+            </a:prstGeom>
+            <a:solidFill>
+              <a:srgbClr val="FF9900">
+                <a:alpha val="16000"/>
+              </a:srgbClr>
+            </a:solidFill>
+            <a:ln w="9525">
+              <a:solidFill>
+                <a:srgbClr val="BEB2A1">
+                  <a:alpha val="30000"/>
+                </a:srgbClr>
+              </a:solidFill>
+            </a:ln>
+          </p:spPr>
+        </p:sp>
+        <p:sp>
+          <p:nvSpPr>
+            <p:cNvPr id="18" name="TextBox 18"/>
+            <p:cNvSpPr txBox="1"/>
+            <p:nvPr/>
+          </p:nvSpPr>
+          <p:spPr>
+            <a:xfrm>
+              <a:off x="717804" y="5743575"/>
+              <a:ext cx="802546" cy="234696"/>
+            </a:xfrm>
+            <a:prstGeom prst="rect">
+              <a:avLst/>
+            </a:prstGeom>
+            <a:noFill/>
+            <a:ln>
+              <a:noFill/>
+            </a:ln>
+          </p:spPr>
+          <p:txBody>
+            <a:bodyPr wrap="none" lIns="0" tIns="0" rIns="0" bIns="0" anchor="t" anchorCtr="0">
+              <a:spAutoFit/>
+            </a:bodyPr>
+            <a:lstStyle/>
+            <a:p>
+              <a:pPr algn="l"/>
+              <a:r>
+                <a:rPr lang="zh-CN" sz="1200" b="1" dirty="0">
+                  <a:solidFill>
+                    <a:srgbClr val="0F1115"/>
+                  </a:solidFill>
+                  <a:latin typeface="+mn-lt"/>
+                  <a:ea typeface="+mn-ea"/>
+                  <a:cs typeface="+mn-cs"/>
+                </a:rPr>
+                <a:t>1 界定范围</a:t>
+              </a:r>
+            </a:p>
+          </p:txBody>
+        </p:sp>
+        <p:sp>
+          <p:nvSpPr>
+            <p:cNvPr id="19" name="Rectangle 19"/>
+            <p:cNvSpPr/>
+            <p:nvPr/>
+          </p:nvSpPr>
+          <p:spPr>
+            <a:xfrm>
+              <a:off x="3352800" y="5600700"/>
+              <a:ext cx="2667000" cy="457200"/>
+            </a:xfrm>
+            <a:prstGeom prst="roundRect">
+              <a:avLst>
+                <a:gd name="adj" fmla="val 33333"/>
+              </a:avLst>
+            </a:prstGeom>
+            <a:solidFill>
+              <a:srgbClr val="FFFFFF">
+                <a:alpha val="60000"/>
+              </a:srgbClr>
+            </a:solidFill>
+            <a:ln w="9525">
+              <a:solidFill>
+                <a:srgbClr val="BEB2A1">
+                  <a:alpha val="30000"/>
+                </a:srgbClr>
+              </a:solidFill>
+            </a:ln>
+          </p:spPr>
+        </p:sp>
+        <p:sp>
+          <p:nvSpPr>
+            <p:cNvPr id="20" name="TextBox 20"/>
+            <p:cNvSpPr txBox="1"/>
+            <p:nvPr/>
+          </p:nvSpPr>
+          <p:spPr>
+            <a:xfrm>
+              <a:off x="3537204" y="5743575"/>
+              <a:ext cx="802546" cy="234696"/>
+            </a:xfrm>
+            <a:prstGeom prst="rect">
+              <a:avLst/>
+            </a:prstGeom>
+            <a:noFill/>
+            <a:ln>
+              <a:noFill/>
+            </a:ln>
+          </p:spPr>
+          <p:txBody>
+            <a:bodyPr wrap="none" lIns="0" tIns="0" rIns="0" bIns="0" anchor="t" anchorCtr="0">
+              <a:spAutoFit/>
+            </a:bodyPr>
+            <a:lstStyle/>
+            <a:p>
+              <a:pPr algn="l"/>
+              <a:r>
+                <a:rPr lang="zh-CN" sz="1200" b="1" dirty="0">
+                  <a:solidFill>
+                    <a:srgbClr val="404040"/>
+                  </a:solidFill>
+                  <a:latin typeface="+mn-lt"/>
+                  <a:ea typeface="+mn-ea"/>
+                  <a:cs typeface="+mn-cs"/>
+                </a:rPr>
+                <a:t>2 清点资料</a:t>
+              </a:r>
+            </a:p>
+          </p:txBody>
+        </p:sp>
+        <p:sp>
+          <p:nvSpPr>
+            <p:cNvPr id="21" name="Rectangle 21"/>
+            <p:cNvSpPr/>
+            <p:nvPr/>
+          </p:nvSpPr>
+          <p:spPr>
+            <a:xfrm>
+              <a:off x="6172200" y="5600700"/>
+              <a:ext cx="2667000" cy="457200"/>
+            </a:xfrm>
+            <a:prstGeom prst="roundRect">
+              <a:avLst>
+                <a:gd name="adj" fmla="val 33333"/>
+              </a:avLst>
+            </a:prstGeom>
+            <a:solidFill>
+              <a:srgbClr val="FFFFFF">
+                <a:alpha val="60000"/>
+              </a:srgbClr>
+            </a:solidFill>
+            <a:ln w="9525">
+              <a:solidFill>
+                <a:srgbClr val="BEB2A1">
+                  <a:alpha val="30000"/>
+                </a:srgbClr>
+              </a:solidFill>
+            </a:ln>
+          </p:spPr>
+        </p:sp>
+        <p:sp>
+          <p:nvSpPr>
+            <p:cNvPr id="22" name="TextBox 22"/>
+            <p:cNvSpPr txBox="1"/>
+            <p:nvPr/>
+          </p:nvSpPr>
+          <p:spPr>
+            <a:xfrm>
+              <a:off x="6356604" y="5743575"/>
+              <a:ext cx="802546" cy="234696"/>
+            </a:xfrm>
+            <a:prstGeom prst="rect">
+              <a:avLst/>
+            </a:prstGeom>
+            <a:noFill/>
+            <a:ln>
+              <a:noFill/>
+            </a:ln>
+          </p:spPr>
+          <p:txBody>
+            <a:bodyPr wrap="none" lIns="0" tIns="0" rIns="0" bIns="0" anchor="t" anchorCtr="0">
+              <a:spAutoFit/>
+            </a:bodyPr>
+            <a:lstStyle/>
+            <a:p>
+              <a:pPr algn="l"/>
+              <a:r>
+                <a:rPr lang="zh-CN" sz="1200" b="1" dirty="0">
+                  <a:solidFill>
+                    <a:srgbClr val="404040"/>
+                  </a:solidFill>
+                  <a:latin typeface="+mn-lt"/>
+                  <a:ea typeface="+mn-ea"/>
+                  <a:cs typeface="+mn-cs"/>
+                </a:rPr>
+                <a:t>3 比较版本</a:t>
+              </a:r>
+            </a:p>
+          </p:txBody>
+        </p:sp>
+        <p:sp>
+          <p:nvSpPr>
+            <p:cNvPr id="23" name="Rectangle 23"/>
+            <p:cNvSpPr/>
+            <p:nvPr/>
+          </p:nvSpPr>
+          <p:spPr>
+            <a:xfrm>
+              <a:off x="8991600" y="5600700"/>
+              <a:ext cx="2667000" cy="457200"/>
+            </a:xfrm>
+            <a:prstGeom prst="roundRect">
+              <a:avLst>
+                <a:gd name="adj" fmla="val 33333"/>
+              </a:avLst>
+            </a:prstGeom>
+            <a:solidFill>
+              <a:srgbClr val="FFFFFF">
+                <a:alpha val="60000"/>
+              </a:srgbClr>
+            </a:solidFill>
+            <a:ln w="9525">
+              <a:solidFill>
+                <a:srgbClr val="BEB2A1">
+                  <a:alpha val="30000"/>
+                </a:srgbClr>
+              </a:solidFill>
+            </a:ln>
+          </p:spPr>
+        </p:sp>
+        <p:sp>
+          <p:nvSpPr>
+            <p:cNvPr id="24" name="TextBox 24"/>
+            <p:cNvSpPr txBox="1"/>
+            <p:nvPr/>
+          </p:nvSpPr>
+          <p:spPr>
+            <a:xfrm>
+              <a:off x="9176004" y="5743575"/>
+              <a:ext cx="802546" cy="234696"/>
+            </a:xfrm>
+            <a:prstGeom prst="rect">
+              <a:avLst/>
+            </a:prstGeom>
+            <a:noFill/>
+            <a:ln>
+              <a:noFill/>
+            </a:ln>
+          </p:spPr>
+          <p:txBody>
+            <a:bodyPr wrap="none" lIns="0" tIns="0" rIns="0" bIns="0" anchor="t" anchorCtr="0">
+              <a:spAutoFit/>
+            </a:bodyPr>
+            <a:lstStyle/>
+            <a:p>
+              <a:pPr algn="l"/>
+              <a:r>
+                <a:rPr lang="zh-CN" sz="1200" b="1" dirty="0">
+                  <a:solidFill>
+                    <a:srgbClr val="404040"/>
+                  </a:solidFill>
+                  <a:latin typeface="+mn-lt"/>
+                  <a:ea typeface="+mn-ea"/>
+                  <a:cs typeface="+mn-cs"/>
+                </a:rPr>
+                <a:t>4 排定计划</a:t>
+              </a:r>
+            </a:p>
+          </p:txBody>
+        </p:sp>
+      </p:grpSp>
+      <p:grpSp>
+        <p:nvGrpSpPr>
+          <p:cNvPr id="28" name="footer"/>
           <p:cNvGrpSpPr/>
           <p:nvPr/>
         </p:nvGrpSpPr>
@@ -3443,7 +3940,7 @@
         </p:grpSpPr>
         <p:sp>
           <p:nvSpPr>
-            <p:cNvPr id="16" name="TextBox 16"/>
+            <p:cNvPr id="26" name="TextBox 26"/>
             <p:cNvSpPr txBox="1"/>
             <p:nvPr/>
           </p:nvSpPr>
@@ -3483,7 +3980,7 @@
         </p:sp>
         <p:sp>
           <p:nvSpPr>
-            <p:cNvPr id="17" name="TextBox 17"/>
+            <p:cNvPr id="27" name="TextBox 27"/>
             <p:cNvSpPr txBox="1"/>
             <p:nvPr/>
           </p:nvSpPr>
@@ -3530,6 +4027,136 @@
   <p:transition p14:dur="400">
     <p:fade/>
   </p:transition>
+  <p:timing>
+    <p:tnLst>
+      <p:par>
+        <p:cTn id="1" dur="indefinite" restart="never" nodeType="tmRoot">
+          <p:childTnLst>
+            <p:seq concurrent="1" nextAc="seek">
+              <p:cTn id="2" dur="indefinite" nodeType="mainSeq">
+                <p:childTnLst>
+                  <p:par>
+                    <p:cTn id="3" fill="hold">
+                      <p:stCondLst>
+                        <p:cond delay="indefinite"/>
+                        <p:cond evt="onBegin" delay="0">
+                          <p:tn val="2"/>
+                        </p:cond>
+                      </p:stCondLst>
+                      <p:childTnLst>
+                        <p:par>
+                          <p:cTn id="4" fill="hold">
+                            <p:stCondLst>
+                              <p:cond delay="0"/>
+                            </p:stCondLst>
+                            <p:childTnLst>
+                              <p:par>
+                                <p:cTn id="5" presetID="10" presetClass="entr" presetSubtype="0" fill="hold" grpId="0" nodeType="withEffect" decel="70000">
+                                  <p:stCondLst>
+                                    <p:cond delay="0"/>
+                                  </p:stCondLst>
+                                  <p:childTnLst>
+                                    <p:set>
+                                      <p:cBhvr>
+                                        <p:cTn id="6" dur="1" fill="hold">
+                                          <p:stCondLst>
+                                            <p:cond delay="0"/>
+                                          </p:stCondLst>
+                                        </p:cTn>
+                                        <p:tgtEl>
+                                          <p:spTgt spid="16"/>
+                                        </p:tgtEl>
+                                        <p:attrNameLst>
+                                          <p:attrName>style.visibility</p:attrName>
+                                        </p:attrNameLst>
+                                      </p:cBhvr>
+                                      <p:to>
+                                        <p:strVal val="visible"/>
+                                      </p:to>
+                                    </p:set>
+                                    <p:animEffect transition="in" filter="fade">
+                                      <p:cBhvr>
+                                        <p:cTn id="7" dur="520"/>
+                                        <p:tgtEl>
+                                          <p:spTgt spid="16"/>
+                                        </p:tgtEl>
+                                      </p:cBhvr>
+                                    </p:animEffect>
+                                  </p:childTnLst>
+                                </p:cTn>
+                              </p:par>
+                            </p:childTnLst>
+                          </p:cTn>
+                        </p:par>
+                        <p:par>
+                          <p:cTn id="8" fill="hold">
+                            <p:stCondLst>
+                              <p:cond delay="0"/>
+                            </p:stCondLst>
+                            <p:childTnLst>
+                              <p:par>
+                                <p:cTn id="9" presetID="10" presetClass="entr" presetSubtype="0" fill="hold" grpId="0" nodeType="withEffect" decel="70000">
+                                  <p:stCondLst>
+                                    <p:cond delay="70"/>
+                                  </p:stCondLst>
+                                  <p:childTnLst>
+                                    <p:set>
+                                      <p:cBhvr>
+                                        <p:cTn id="10" dur="1" fill="hold">
+                                          <p:stCondLst>
+                                            <p:cond delay="0"/>
+                                          </p:stCondLst>
+                                        </p:cTn>
+                                        <p:tgtEl>
+                                          <p:spTgt spid="25"/>
+                                        </p:tgtEl>
+                                        <p:attrNameLst>
+                                          <p:attrName>style.visibility</p:attrName>
+                                        </p:attrNameLst>
+                                      </p:cBhvr>
+                                      <p:to>
+                                        <p:strVal val="visible"/>
+                                      </p:to>
+                                    </p:set>
+                                    <p:animEffect transition="in" filter="fade">
+                                      <p:cBhvr>
+                                        <p:cTn id="11" dur="520"/>
+                                        <p:tgtEl>
+                                          <p:spTgt spid="25"/>
+                                        </p:tgtEl>
+                                      </p:cBhvr>
+                                    </p:animEffect>
+                                  </p:childTnLst>
+                                </p:cTn>
+                              </p:par>
+                            </p:childTnLst>
+                          </p:cTn>
+                        </p:par>
+                      </p:childTnLst>
+                    </p:cTn>
+                  </p:par>
+                </p:childTnLst>
+              </p:cTn>
+              <p:prevCondLst>
+                <p:cond evt="onPrev" delay="0">
+                  <p:tgtEl>
+                    <p:sldTgt/>
+                  </p:tgtEl>
+                </p:cond>
+              </p:prevCondLst>
+              <p:nextCondLst>
+                <p:cond evt="onNext" delay="0">
+                  <p:tgtEl>
+                    <p:sldTgt/>
+                  </p:tgtEl>
+                </p:cond>
+              </p:nextCondLst>
+            </p:seq>
+          </p:childTnLst>
+        </p:cTn>
+      </p:par>
+    </p:tnLst>
+  </p:timing>
 </p:sld>
 </file>
 
@@ -3591,7 +4218,7 @@
         </p:grpSpPr>
         <p:sp xmlns:p="http://schemas.openxmlformats.org/presentationml/2006/main" xmlns:a="http://schemas.openxmlformats.org/drawingml/2006/main">
           <p:nvSpPr>
-            <p:cNvPr id="19" name="kz-facet-o"/>
+            <p:cNvPr id="29" name="kz-facet-o"/>
             <p:cNvSpPr/>
             <p:nvPr/>
           </p:nvSpPr>
@@ -3659,7 +4286,7 @@
         </p:sp>
         <p:sp xmlns:p="http://schemas.openxmlformats.org/presentationml/2006/main" xmlns:a="http://schemas.openxmlformats.org/drawingml/2006/main">
           <p:nvSpPr>
-            <p:cNvPr id="20" name="kz-facet-y"/>
+            <p:cNvPr id="30" name="kz-facet-y"/>
             <p:cNvSpPr/>
             <p:nvPr/>
           </p:nvSpPr>
@@ -3727,7 +4354,7 @@
         </p:sp>
         <p:sp xmlns:p="http://schemas.openxmlformats.org/presentationml/2006/main" xmlns:a="http://schemas.openxmlformats.org/drawingml/2006/main">
           <p:nvSpPr>
-            <p:cNvPr id="21" name="kz-facet-o-candy"/>
+            <p:cNvPr id="31" name="kz-facet-o-candy"/>
             <p:cNvSpPr/>
             <p:nvPr/>
           </p:nvSpPr>
@@ -3823,7 +4450,7 @@
         </p:sp>
         <p:sp xmlns:p="http://schemas.openxmlformats.org/presentationml/2006/main" xmlns:a="http://schemas.openxmlformats.org/drawingml/2006/main">
           <p:nvSpPr>
-            <p:cNvPr id="22" name="kz-facet-y-candy"/>
+            <p:cNvPr id="32" name="kz-facet-y-candy"/>
             <p:cNvSpPr/>
             <p:nvPr/>
           </p:nvSpPr>
@@ -3927,9 +4554,9 @@
         <p:grpSpPr>
           <a:xfrm>
             <a:off x="854583" y="241300"/>
-            <a:ext cx="1962912" cy="469392"/>
+            <a:ext cx="1316736" cy="469392"/>
             <a:chOff x="854583" y="241300"/>
-            <a:chExt cx="1962912" cy="469392"/>
+            <a:chExt cx="1316736" cy="469392"/>
           </a:xfrm>
         </p:grpSpPr>
         <p:sp>
@@ -3941,7 +4568,7 @@
           <p:spPr>
             <a:xfrm>
               <a:off x="854583" y="241300"/>
-              <a:ext cx="1962912" cy="469392"/>
+              <a:ext cx="1316736" cy="469392"/>
             </a:xfrm>
             <a:prstGeom prst="rect">
               <a:avLst/>
@@ -3967,7 +4594,7 @@
                   <a:ea typeface="+mn-ea"/>
                   <a:cs typeface="+mn-cs"/>
                 </a:rPr>
-                <a:t>证据组织过程</a:t>
+                <a:t>核对流程</a:t>
               </a:r>
             </a:p>
           </p:txBody>
@@ -4035,16 +4662,16 @@
       </p:pic>
       <p:grpSp>
         <p:nvGrpSpPr>
-          <p:cNvPr id="15" name="!!kz-carrier"/>
+          <p:cNvPr id="16" name="!!kz-carrier"/>
           <p:cNvGrpSpPr/>
           <p:nvPr/>
         </p:nvGrpSpPr>
         <p:grpSpPr>
           <a:xfrm>
-            <a:off x="762000" y="1143000"/>
-            <a:ext cx="7239000" cy="4476750"/>
-            <a:chOff x="762000" y="1143000"/>
-            <a:chExt cx="7239000" cy="4476750"/>
+            <a:off x="914400" y="1828800"/>
+            <a:ext cx="10363200" cy="2857500"/>
+            <a:chOff x="914400" y="1828800"/>
+            <a:chExt cx="10363200" cy="2857500"/>
           </a:xfrm>
         </p:grpSpPr>
         <p:sp>
@@ -4055,12 +4682,12 @@
           </p:nvSpPr>
           <p:spPr>
             <a:xfrm>
-              <a:off x="762000" y="1143000"/>
-              <a:ext cx="7239000" cy="4476750"/>
+              <a:off x="914400" y="1828800"/>
+              <a:ext cx="10363200" cy="2857500"/>
             </a:xfrm>
             <a:prstGeom prst="roundRect">
               <a:avLst>
-                <a:gd name="adj" fmla="val 5957"/>
+                <a:gd name="adj" fmla="val 9333"/>
               </a:avLst>
             </a:prstGeom>
             <a:gradFill>
@@ -4107,8 +4734,8 @@
           </p:nvSpPr>
           <p:spPr>
             <a:xfrm>
-              <a:off x="3846576" y="1435100"/>
-              <a:ext cx="1069848" cy="381381"/>
+              <a:off x="1286256" y="2184400"/>
+              <a:ext cx="987552" cy="352044"/>
             </a:xfrm>
             <a:prstGeom prst="rect">
               <a:avLst/>
@@ -4124,9 +4751,9 @@
             </a:bodyPr>
             <a:lstStyle/>
             <a:p>
-              <a:pPr algn="ctr"/>
+              <a:pPr algn="l"/>
               <a:r>
-                <a:rPr lang="zh-CN" sz="1950" b="1" dirty="0">
+                <a:rPr lang="zh-CN" sz="1800" b="1" dirty="0">
                   <a:solidFill>
                     <a:srgbClr val="0F1115"/>
                   </a:solidFill>
@@ -4134,7 +4761,7 @@
                   <a:ea typeface="+mn-ea"/>
                   <a:cs typeface="+mn-cs"/>
                 </a:rPr>
-                <a:t>整理证据</a:t>
+                <a:t>清点资料</a:t>
               </a:r>
             </a:p>
           </p:txBody>
@@ -4147,8 +4774,48 @@
           </p:nvSpPr>
           <p:spPr>
             <a:xfrm>
-              <a:off x="1059180" y="1898650"/>
-              <a:ext cx="2787015" cy="1436370"/>
+              <a:off x="1289304" y="2590800"/>
+              <a:ext cx="2919984" cy="234696"/>
+            </a:xfrm>
+            <a:prstGeom prst="rect">
+              <a:avLst/>
+            </a:prstGeom>
+            <a:noFill/>
+            <a:ln>
+              <a:noFill/>
+            </a:ln>
+          </p:spPr>
+          <p:txBody>
+            <a:bodyPr wrap="none" lIns="0" tIns="0" rIns="0" bIns="0" anchor="t" anchorCtr="0">
+              <a:spAutoFit/>
+            </a:bodyPr>
+            <a:lstStyle/>
+            <a:p>
+              <a:pPr algn="l"/>
+              <a:r>
+                <a:rPr lang="zh-CN" sz="1200" dirty="0">
+                  <a:solidFill>
+                    <a:srgbClr val="64676B"/>
+                  </a:solidFill>
+                  <a:latin typeface="+mn-lt"/>
+                  <a:ea typeface="+mn-ea"/>
+                  <a:cs typeface="+mn-cs"/>
+                </a:rPr>
+                <a:t>逐组登记应收与已收，缺失照原样保留。</a:t>
+              </a:r>
+            </a:p>
+          </p:txBody>
+        </p:sp>
+        <p:sp>
+          <p:nvSpPr>
+            <p:cNvPr id="15" name="TextBox 15"/>
+            <p:cNvSpPr txBox="1"/>
+            <p:nvPr/>
+          </p:nvSpPr>
+          <p:spPr>
+            <a:xfrm>
+              <a:off x="1287780" y="2914650"/>
+              <a:ext cx="3282315" cy="1093470"/>
             </a:xfrm>
             <a:prstGeom prst="rect">
               <a:avLst/>
@@ -4166,7 +4833,7 @@
             <a:p>
               <a:pPr algn="l" marL="161925" indent="-161925">
                 <a:lnSpc>
-                  <a:spcPts val="3000"/>
+                  <a:spcPts val="3150"/>
                 </a:lnSpc>
                 <a:buClr>
                   <a:srgbClr val="404040"/>
@@ -4184,13 +4851,24 @@
                   <a:ea typeface="+mn-ea"/>
                   <a:cs typeface="+mn-cs"/>
                 </a:rPr>
-                <a:t>方案与修订：V2.1 / V2.3</a:t>
+                <a:t>应收 24 份，已收 20 份，</a:t>
+              </a:r>
+              <a:r>
+                <a:rPr lang="zh-CN" sz="1500" b="1" dirty="0">
+                  <a:solidFill>
+                    <a:srgbClr val="C00000"/>
+                  </a:solidFill>
+                  <a:latin typeface="+mn-lt"/>
+                  <a:ea typeface="+mn-ea"/>
+                  <a:cs typeface="+mn-cs"/>
+                </a:rPr>
+                <a:t>缺 4 份</a:t>
               </a:r>
             </a:p>
             <a:p>
               <a:pPr algn="l" marL="161925" indent="-161925">
                 <a:lnSpc>
-                  <a:spcPts val="3000"/>
+                  <a:spcPts val="3150"/>
                 </a:lnSpc>
                 <a:buClr>
                   <a:srgbClr val="404040"/>
@@ -4208,13 +4886,13 @@
                   <a:ea typeface="+mn-ea"/>
                   <a:cs typeface="+mn-cs"/>
                 </a:rPr>
-                <a:t>中心记录：9 份完整，3 份缺失</a:t>
+                <a:t>中心记录缺 3 份，安全性报告缺 1 份</a:t>
               </a:r>
             </a:p>
             <a:p>
               <a:pPr algn="l" marL="161925" indent="-161925">
                 <a:lnSpc>
-                  <a:spcPts val="3000"/>
+                  <a:spcPts val="3150"/>
                 </a:lnSpc>
                 <a:buClr>
                   <a:srgbClr val="404040"/>
@@ -4232,23 +4910,95 @@
                   <a:ea typeface="+mn-ea"/>
                   <a:cs typeface="+mn-cs"/>
                 </a:rPr>
-                <a:t>实验室数据：按访视窗口归组</a:t>
+                <a:t>缺失记录保留为空值，</a:t>
+              </a:r>
+              <a:r>
+                <a:rPr lang="zh-CN" sz="1500" b="1" dirty="0">
+                  <a:solidFill>
+                    <a:srgbClr val="0F1115"/>
+                  </a:solidFill>
+                  <a:latin typeface="+mn-lt"/>
+                  <a:ea typeface="+mn-ea"/>
+                  <a:cs typeface="+mn-cs"/>
+                </a:rPr>
+                <a:t>不按零处理</a:t>
               </a:r>
             </a:p>
+          </p:txBody>
+        </p:sp>
+      </p:grpSp>
+      <p:grpSp>
+        <p:nvGrpSpPr>
+          <p:cNvPr id="25" name="steps"/>
+          <p:cNvGrpSpPr/>
+          <p:nvPr/>
+        </p:nvGrpSpPr>
+        <p:grpSpPr>
+          <a:xfrm>
+            <a:off x="533400" y="5600700"/>
+            <a:ext cx="11125200" cy="457200"/>
+            <a:chOff x="533400" y="5600700"/>
+            <a:chExt cx="11125200" cy="457200"/>
+          </a:xfrm>
+        </p:grpSpPr>
+        <p:sp>
+          <p:nvSpPr>
+            <p:cNvPr id="17" name="Rectangle 17"/>
+            <p:cNvSpPr/>
+            <p:nvPr/>
+          </p:nvSpPr>
+          <p:spPr>
+            <a:xfrm>
+              <a:off x="533400" y="5600700"/>
+              <a:ext cx="2667000" cy="457200"/>
+            </a:xfrm>
+            <a:prstGeom prst="roundRect">
+              <a:avLst>
+                <a:gd name="adj" fmla="val 33333"/>
+              </a:avLst>
+            </a:prstGeom>
+            <a:solidFill>
+              <a:srgbClr val="FFFFFF">
+                <a:alpha val="60000"/>
+              </a:srgbClr>
+            </a:solidFill>
+            <a:ln w="9525">
+              <a:solidFill>
+                <a:srgbClr val="BEB2A1">
+                  <a:alpha val="30000"/>
+                </a:srgbClr>
+              </a:solidFill>
+            </a:ln>
+          </p:spPr>
+        </p:sp>
+        <p:sp>
+          <p:nvSpPr>
+            <p:cNvPr id="18" name="TextBox 18"/>
+            <p:cNvSpPr txBox="1"/>
+            <p:nvPr/>
+          </p:nvSpPr>
+          <p:spPr>
+            <a:xfrm>
+              <a:off x="717804" y="5743575"/>
+              <a:ext cx="802546" cy="234696"/>
+            </a:xfrm>
+            <a:prstGeom prst="rect">
+              <a:avLst/>
+            </a:prstGeom>
+            <a:noFill/>
+            <a:ln>
+              <a:noFill/>
+            </a:ln>
+          </p:spPr>
+          <p:txBody>
+            <a:bodyPr wrap="none" lIns="0" tIns="0" rIns="0" bIns="0" anchor="t" anchorCtr="0">
+              <a:spAutoFit/>
+            </a:bodyPr>
+            <a:lstStyle/>
             <a:p>
-              <a:pPr algn="l" marL="161925" indent="-161925">
-                <a:lnSpc>
-                  <a:spcPts val="3000"/>
-                </a:lnSpc>
-                <a:buClr>
-                  <a:srgbClr val="404040"/>
-                </a:buClr>
-                <a:buSzTx/>
-                <a:buFontTx/>
-                <a:buChar char="•"/>
-              </a:pPr>
+              <a:pPr algn="l"/>
               <a:r>
-                <a:rPr lang="zh-CN" sz="1500" dirty="0">
+                <a:rPr lang="zh-CN" sz="1200" b="1" dirty="0">
                   <a:solidFill>
                     <a:srgbClr val="404040"/>
                   </a:solidFill>
@@ -4256,15 +5006,225 @@
                   <a:ea typeface="+mn-ea"/>
                   <a:cs typeface="+mn-cs"/>
                 </a:rPr>
-                <a:t>缺失记录保留为空值</a:t>
+                <a:t>1 界定范围</a:t>
               </a:r>
             </a:p>
           </p:txBody>
         </p:sp>
+        <p:sp>
+          <p:nvSpPr>
+            <p:cNvPr id="19" name="Rectangle 19"/>
+            <p:cNvSpPr/>
+            <p:nvPr/>
+          </p:nvSpPr>
+          <p:spPr>
+            <a:xfrm>
+              <a:off x="3352800" y="5600700"/>
+              <a:ext cx="2667000" cy="457200"/>
+            </a:xfrm>
+            <a:prstGeom prst="roundRect">
+              <a:avLst>
+                <a:gd name="adj" fmla="val 33333"/>
+              </a:avLst>
+            </a:prstGeom>
+            <a:solidFill>
+              <a:srgbClr val="FF9900">
+                <a:alpha val="16000"/>
+              </a:srgbClr>
+            </a:solidFill>
+            <a:ln w="9525">
+              <a:solidFill>
+                <a:srgbClr val="BEB2A1">
+                  <a:alpha val="30000"/>
+                </a:srgbClr>
+              </a:solidFill>
+            </a:ln>
+          </p:spPr>
+        </p:sp>
+        <p:sp>
+          <p:nvSpPr>
+            <p:cNvPr id="20" name="TextBox 20"/>
+            <p:cNvSpPr txBox="1"/>
+            <p:nvPr/>
+          </p:nvSpPr>
+          <p:spPr>
+            <a:xfrm>
+              <a:off x="3537204" y="5743575"/>
+              <a:ext cx="802546" cy="234696"/>
+            </a:xfrm>
+            <a:prstGeom prst="rect">
+              <a:avLst/>
+            </a:prstGeom>
+            <a:noFill/>
+            <a:ln>
+              <a:noFill/>
+            </a:ln>
+          </p:spPr>
+          <p:txBody>
+            <a:bodyPr wrap="none" lIns="0" tIns="0" rIns="0" bIns="0" anchor="t" anchorCtr="0">
+              <a:spAutoFit/>
+            </a:bodyPr>
+            <a:lstStyle/>
+            <a:p>
+              <a:pPr algn="l"/>
+              <a:r>
+                <a:rPr lang="zh-CN" sz="1200" b="1" dirty="0">
+                  <a:solidFill>
+                    <a:srgbClr val="0F1115"/>
+                  </a:solidFill>
+                  <a:latin typeface="+mn-lt"/>
+                  <a:ea typeface="+mn-ea"/>
+                  <a:cs typeface="+mn-cs"/>
+                </a:rPr>
+                <a:t>2 清点资料</a:t>
+              </a:r>
+            </a:p>
+          </p:txBody>
+        </p:sp>
+        <p:sp>
+          <p:nvSpPr>
+            <p:cNvPr id="21" name="Rectangle 21"/>
+            <p:cNvSpPr/>
+            <p:nvPr/>
+          </p:nvSpPr>
+          <p:spPr>
+            <a:xfrm>
+              <a:off x="6172200" y="5600700"/>
+              <a:ext cx="2667000" cy="457200"/>
+            </a:xfrm>
+            <a:prstGeom prst="roundRect">
+              <a:avLst>
+                <a:gd name="adj" fmla="val 33333"/>
+              </a:avLst>
+            </a:prstGeom>
+            <a:solidFill>
+              <a:srgbClr val="FFFFFF">
+                <a:alpha val="60000"/>
+              </a:srgbClr>
+            </a:solidFill>
+            <a:ln w="9525">
+              <a:solidFill>
+                <a:srgbClr val="BEB2A1">
+                  <a:alpha val="30000"/>
+                </a:srgbClr>
+              </a:solidFill>
+            </a:ln>
+          </p:spPr>
+        </p:sp>
+        <p:sp>
+          <p:nvSpPr>
+            <p:cNvPr id="22" name="TextBox 22"/>
+            <p:cNvSpPr txBox="1"/>
+            <p:nvPr/>
+          </p:nvSpPr>
+          <p:spPr>
+            <a:xfrm>
+              <a:off x="6356604" y="5743575"/>
+              <a:ext cx="802546" cy="234696"/>
+            </a:xfrm>
+            <a:prstGeom prst="rect">
+              <a:avLst/>
+            </a:prstGeom>
+            <a:noFill/>
+            <a:ln>
+              <a:noFill/>
+            </a:ln>
+          </p:spPr>
+          <p:txBody>
+            <a:bodyPr wrap="none" lIns="0" tIns="0" rIns="0" bIns="0" anchor="t" anchorCtr="0">
+              <a:spAutoFit/>
+            </a:bodyPr>
+            <a:lstStyle/>
+            <a:p>
+              <a:pPr algn="l"/>
+              <a:r>
+                <a:rPr lang="zh-CN" sz="1200" b="1" dirty="0">
+                  <a:solidFill>
+                    <a:srgbClr val="404040"/>
+                  </a:solidFill>
+                  <a:latin typeface="+mn-lt"/>
+                  <a:ea typeface="+mn-ea"/>
+                  <a:cs typeface="+mn-cs"/>
+                </a:rPr>
+                <a:t>3 比较版本</a:t>
+              </a:r>
+            </a:p>
+          </p:txBody>
+        </p:sp>
+        <p:sp>
+          <p:nvSpPr>
+            <p:cNvPr id="23" name="Rectangle 23"/>
+            <p:cNvSpPr/>
+            <p:nvPr/>
+          </p:nvSpPr>
+          <p:spPr>
+            <a:xfrm>
+              <a:off x="8991600" y="5600700"/>
+              <a:ext cx="2667000" cy="457200"/>
+            </a:xfrm>
+            <a:prstGeom prst="roundRect">
+              <a:avLst>
+                <a:gd name="adj" fmla="val 33333"/>
+              </a:avLst>
+            </a:prstGeom>
+            <a:solidFill>
+              <a:srgbClr val="FFFFFF">
+                <a:alpha val="60000"/>
+              </a:srgbClr>
+            </a:solidFill>
+            <a:ln w="9525">
+              <a:solidFill>
+                <a:srgbClr val="BEB2A1">
+                  <a:alpha val="30000"/>
+                </a:srgbClr>
+              </a:solidFill>
+            </a:ln>
+          </p:spPr>
+        </p:sp>
+        <p:sp>
+          <p:nvSpPr>
+            <p:cNvPr id="24" name="TextBox 24"/>
+            <p:cNvSpPr txBox="1"/>
+            <p:nvPr/>
+          </p:nvSpPr>
+          <p:spPr>
+            <a:xfrm>
+              <a:off x="9176004" y="5743575"/>
+              <a:ext cx="802546" cy="234696"/>
+            </a:xfrm>
+            <a:prstGeom prst="rect">
+              <a:avLst/>
+            </a:prstGeom>
+            <a:noFill/>
+            <a:ln>
+              <a:noFill/>
+            </a:ln>
+          </p:spPr>
+          <p:txBody>
+            <a:bodyPr wrap="none" lIns="0" tIns="0" rIns="0" bIns="0" anchor="t" anchorCtr="0">
+              <a:spAutoFit/>
+            </a:bodyPr>
+            <a:lstStyle/>
+            <a:p>
+              <a:pPr algn="l"/>
+              <a:r>
+                <a:rPr lang="zh-CN" sz="1200" b="1" dirty="0">
+                  <a:solidFill>
+                    <a:srgbClr val="404040"/>
+                  </a:solidFill>
+                  <a:latin typeface="+mn-lt"/>
+                  <a:ea typeface="+mn-ea"/>
+                  <a:cs typeface="+mn-cs"/>
+                </a:rPr>
+                <a:t>4 排定计划</a:t>
+              </a:r>
+            </a:p>
+          </p:txBody>
+        </p:sp>
       </p:grpSp>
       <p:grpSp>
         <p:nvGrpSpPr>
-          <p:cNvPr id="18" name="footer"/>
+          <p:cNvPr id="28" name="footer"/>
           <p:cNvGrpSpPr/>
           <p:nvPr/>
         </p:nvGrpSpPr>
@@ -4278,7 +5238,7 @@
         </p:grpSpPr>
         <p:sp>
           <p:nvSpPr>
-            <p:cNvPr id="16" name="TextBox 16"/>
+            <p:cNvPr id="26" name="TextBox 26"/>
             <p:cNvSpPr txBox="1"/>
             <p:nvPr/>
           </p:nvSpPr>
@@ -4318,7 +5278,7 @@
         </p:sp>
         <p:sp>
           <p:nvSpPr>
-            <p:cNvPr id="17" name="TextBox 17"/>
+            <p:cNvPr id="27" name="TextBox 27"/>
             <p:cNvSpPr txBox="1"/>
             <p:nvPr/>
           </p:nvSpPr>

--- a/examples/reference/pptx/kangzhe_probe.pptx
+++ b/examples/reference/pptx/kangzhe_probe.pptx
@@ -949,7 +949,7 @@
                               <p:par>
                                 <p:cTn xmlns:p="http://schemas.openxmlformats.org/presentationml/2006/main" id="9" presetID="10" presetClass="entr" presetSubtype="0" fill="hold" grpId="0" nodeType="withEffect" decel="70000">
                                   <p:stCondLst>
-                                    <p:cond delay="70"/>
+                                    <p:cond delay="180"/>
                                   </p:stCondLst>
                                   <p:childTnLst>
                                     <p:set>
@@ -987,13 +987,13 @@
                         <p:par>
                           <p:cTn id="12" fill="hold">
                             <p:stCondLst>
-                              <p:cond delay="70"/>
+                              <p:cond delay="180"/>
                             </p:stCondLst>
                             <p:childTnLst>
                               <p:par>
                                 <p:cTn xmlns:p="http://schemas.openxmlformats.org/presentationml/2006/main" id="13" presetID="10" presetClass="entr" presetSubtype="0" fill="hold" grpId="0" nodeType="withEffect" decel="70000">
                                   <p:stCondLst>
-                                    <p:cond delay="140"/>
+                                    <p:cond delay="360"/>
                                   </p:stCondLst>
                                   <p:childTnLst>
                                     <p:set>
@@ -2722,7 +2722,7 @@
                               <p:par>
                                 <p:cTn xmlns:p="http://schemas.openxmlformats.org/presentationml/2006/main" id="9" presetID="10" presetClass="entr" presetSubtype="0" fill="hold" grpId="0" nodeType="withEffect" decel="70000">
                                   <p:stCondLst>
-                                    <p:cond delay="70"/>
+                                    <p:cond delay="180"/>
                                   </p:stCondLst>
                                   <p:childTnLst>
                                     <p:set>
@@ -2760,13 +2760,13 @@
                         <p:par>
                           <p:cTn id="12" fill="hold">
                             <p:stCondLst>
-                              <p:cond delay="70"/>
+                              <p:cond delay="180"/>
                             </p:stCondLst>
                             <p:childTnLst>
                               <p:par>
                                 <p:cTn xmlns:p="http://schemas.openxmlformats.org/presentationml/2006/main" id="13" presetID="10" presetClass="entr" presetSubtype="0" fill="hold" grpId="0" nodeType="withEffect" decel="70000">
                                   <p:stCondLst>
-                                    <p:cond delay="140"/>
+                                    <p:cond delay="360"/>
                                   </p:stCondLst>
                                   <p:childTnLst>
                                     <p:set>
@@ -2804,13 +2804,13 @@
                         <p:par>
                           <p:cTn id="16" fill="hold">
                             <p:stCondLst>
-                              <p:cond delay="210"/>
+                              <p:cond delay="540"/>
                             </p:stCondLst>
                             <p:childTnLst>
                               <p:par>
                                 <p:cTn xmlns:p="http://schemas.openxmlformats.org/presentationml/2006/main" id="17" presetID="10" presetClass="entr" presetSubtype="0" fill="hold" grpId="0" nodeType="withEffect" decel="70000">
                                   <p:stCondLst>
-                                    <p:cond delay="410"/>
+                                    <p:cond delay="740"/>
                                   </p:stCondLst>
                                   <p:childTnLst>
                                     <p:set>
@@ -4097,7 +4097,7 @@
                               <p:par>
                                 <p:cTn id="9" presetID="10" presetClass="entr" presetSubtype="0" fill="hold" grpId="0" nodeType="withEffect" decel="70000">
                                   <p:stCondLst>
-                                    <p:cond delay="70"/>
+                                    <p:cond delay="180"/>
                                   </p:stCondLst>
                                   <p:childTnLst>
                                     <p:set>
